--- a/網站與簡報/note.pptx
+++ b/網站與簡報/note.pptx
@@ -8,6 +8,8 @@
     <p:sldId id="257" r:id="rId2"/>
     <p:sldId id="258" r:id="rId3"/>
     <p:sldId id="259" r:id="rId4"/>
+    <p:sldId id="260" r:id="rId5"/>
+    <p:sldId id="261" r:id="rId6"/>
   </p:sldIdLst>
   <p:sldSz cx="12192000" cy="6858000"/>
   <p:notesSz cx="6858000" cy="9144000"/>
@@ -261,7 +263,7 @@
           <a:p>
             <a:fld id="{42C1CF02-BC93-4CFC-8444-C1F68E6A339F}" type="datetimeFigureOut">
               <a:rPr lang="zh-TW" altLang="en-US" smtClean="0"/>
-              <a:t>2026/3/3</a:t>
+              <a:t>2026/3/5</a:t>
             </a:fld>
             <a:endParaRPr lang="zh-TW" altLang="en-US"/>
           </a:p>
@@ -459,7 +461,7 @@
           <a:p>
             <a:fld id="{42C1CF02-BC93-4CFC-8444-C1F68E6A339F}" type="datetimeFigureOut">
               <a:rPr lang="zh-TW" altLang="en-US" smtClean="0"/>
-              <a:t>2026/3/3</a:t>
+              <a:t>2026/3/5</a:t>
             </a:fld>
             <a:endParaRPr lang="zh-TW" altLang="en-US"/>
           </a:p>
@@ -667,7 +669,7 @@
           <a:p>
             <a:fld id="{42C1CF02-BC93-4CFC-8444-C1F68E6A339F}" type="datetimeFigureOut">
               <a:rPr lang="zh-TW" altLang="en-US" smtClean="0"/>
-              <a:t>2026/3/3</a:t>
+              <a:t>2026/3/5</a:t>
             </a:fld>
             <a:endParaRPr lang="zh-TW" altLang="en-US"/>
           </a:p>
@@ -865,7 +867,7 @@
           <a:p>
             <a:fld id="{42C1CF02-BC93-4CFC-8444-C1F68E6A339F}" type="datetimeFigureOut">
               <a:rPr lang="zh-TW" altLang="en-US" smtClean="0"/>
-              <a:t>2026/3/3</a:t>
+              <a:t>2026/3/5</a:t>
             </a:fld>
             <a:endParaRPr lang="zh-TW" altLang="en-US"/>
           </a:p>
@@ -1140,7 +1142,7 @@
           <a:p>
             <a:fld id="{42C1CF02-BC93-4CFC-8444-C1F68E6A339F}" type="datetimeFigureOut">
               <a:rPr lang="zh-TW" altLang="en-US" smtClean="0"/>
-              <a:t>2026/3/3</a:t>
+              <a:t>2026/3/5</a:t>
             </a:fld>
             <a:endParaRPr lang="zh-TW" altLang="en-US"/>
           </a:p>
@@ -1405,7 +1407,7 @@
           <a:p>
             <a:fld id="{42C1CF02-BC93-4CFC-8444-C1F68E6A339F}" type="datetimeFigureOut">
               <a:rPr lang="zh-TW" altLang="en-US" smtClean="0"/>
-              <a:t>2026/3/3</a:t>
+              <a:t>2026/3/5</a:t>
             </a:fld>
             <a:endParaRPr lang="zh-TW" altLang="en-US"/>
           </a:p>
@@ -1817,7 +1819,7 @@
           <a:p>
             <a:fld id="{42C1CF02-BC93-4CFC-8444-C1F68E6A339F}" type="datetimeFigureOut">
               <a:rPr lang="zh-TW" altLang="en-US" smtClean="0"/>
-              <a:t>2026/3/3</a:t>
+              <a:t>2026/3/5</a:t>
             </a:fld>
             <a:endParaRPr lang="zh-TW" altLang="en-US"/>
           </a:p>
@@ -1958,7 +1960,7 @@
           <a:p>
             <a:fld id="{42C1CF02-BC93-4CFC-8444-C1F68E6A339F}" type="datetimeFigureOut">
               <a:rPr lang="zh-TW" altLang="en-US" smtClean="0"/>
-              <a:t>2026/3/3</a:t>
+              <a:t>2026/3/5</a:t>
             </a:fld>
             <a:endParaRPr lang="zh-TW" altLang="en-US"/>
           </a:p>
@@ -2071,7 +2073,7 @@
           <a:p>
             <a:fld id="{42C1CF02-BC93-4CFC-8444-C1F68E6A339F}" type="datetimeFigureOut">
               <a:rPr lang="zh-TW" altLang="en-US" smtClean="0"/>
-              <a:t>2026/3/3</a:t>
+              <a:t>2026/3/5</a:t>
             </a:fld>
             <a:endParaRPr lang="zh-TW" altLang="en-US"/>
           </a:p>
@@ -2382,7 +2384,7 @@
           <a:p>
             <a:fld id="{42C1CF02-BC93-4CFC-8444-C1F68E6A339F}" type="datetimeFigureOut">
               <a:rPr lang="zh-TW" altLang="en-US" smtClean="0"/>
-              <a:t>2026/3/3</a:t>
+              <a:t>2026/3/5</a:t>
             </a:fld>
             <a:endParaRPr lang="zh-TW" altLang="en-US"/>
           </a:p>
@@ -2670,7 +2672,7 @@
           <a:p>
             <a:fld id="{42C1CF02-BC93-4CFC-8444-C1F68E6A339F}" type="datetimeFigureOut">
               <a:rPr lang="zh-TW" altLang="en-US" smtClean="0"/>
-              <a:t>2026/3/3</a:t>
+              <a:t>2026/3/5</a:t>
             </a:fld>
             <a:endParaRPr lang="zh-TW" altLang="en-US"/>
           </a:p>
@@ -2911,7 +2913,7 @@
           <a:p>
             <a:fld id="{42C1CF02-BC93-4CFC-8444-C1F68E6A339F}" type="datetimeFigureOut">
               <a:rPr lang="zh-TW" altLang="en-US" smtClean="0"/>
-              <a:t>2026/3/3</a:t>
+              <a:t>2026/3/5</a:t>
             </a:fld>
             <a:endParaRPr lang="zh-TW" altLang="en-US"/>
           </a:p>
@@ -3836,6 +3838,729 @@
     <p:extLst>
       <p:ext uri="{BB962C8B-B14F-4D97-AF65-F5344CB8AC3E}">
         <p14:creationId xmlns:p14="http://schemas.microsoft.com/office/powerpoint/2010/main" val="1928815907"/>
+      </p:ext>
+    </p:extLst>
+  </p:cSld>
+  <p:clrMapOvr>
+    <a:masterClrMapping/>
+  </p:clrMapOvr>
+</p:sld>
+</file>
+
+<file path=ppt/slides/slide4.xml><?xml version="1.0" encoding="utf-8"?>
+<p:sld xmlns:a="http://schemas.openxmlformats.org/drawingml/2006/main" xmlns:r="http://schemas.openxmlformats.org/officeDocument/2006/relationships" xmlns:p="http://schemas.openxmlformats.org/presentationml/2006/main">
+  <p:cSld>
+    <p:spTree>
+      <p:nvGrpSpPr>
+        <p:cNvPr id="1" name=""/>
+        <p:cNvGrpSpPr/>
+        <p:nvPr/>
+      </p:nvGrpSpPr>
+      <p:grpSpPr>
+        <a:xfrm>
+          <a:off x="0" y="0"/>
+          <a:ext cx="0" cy="0"/>
+          <a:chOff x="0" y="0"/>
+          <a:chExt cx="0" cy="0"/>
+        </a:xfrm>
+      </p:grpSpPr>
+      <p:pic>
+        <p:nvPicPr>
+          <p:cNvPr id="7" name="圖片 6">
+            <a:extLst>
+              <a:ext uri="{FF2B5EF4-FFF2-40B4-BE49-F238E27FC236}">
+                <a16:creationId xmlns:a16="http://schemas.microsoft.com/office/drawing/2014/main" id="{3D513BFA-9E74-A0BC-1201-125E424DE657}"/>
+              </a:ext>
+            </a:extLst>
+          </p:cNvPr>
+          <p:cNvPicPr>
+            <a:picLocks noChangeAspect="1"/>
+          </p:cNvPicPr>
+          <p:nvPr/>
+        </p:nvPicPr>
+        <p:blipFill>
+          <a:blip r:embed="rId2"/>
+          <a:stretch>
+            <a:fillRect/>
+          </a:stretch>
+        </p:blipFill>
+        <p:spPr>
+          <a:xfrm>
+            <a:off x="5447922" y="385483"/>
+            <a:ext cx="4334480" cy="1076475"/>
+          </a:xfrm>
+          <a:prstGeom prst="rect">
+            <a:avLst/>
+          </a:prstGeom>
+        </p:spPr>
+      </p:pic>
+      <p:pic>
+        <p:nvPicPr>
+          <p:cNvPr id="9" name="圖片 8">
+            <a:extLst>
+              <a:ext uri="{FF2B5EF4-FFF2-40B4-BE49-F238E27FC236}">
+                <a16:creationId xmlns:a16="http://schemas.microsoft.com/office/drawing/2014/main" id="{F7CDC234-038D-AAC7-5917-E0B41A90FBA0}"/>
+              </a:ext>
+            </a:extLst>
+          </p:cNvPr>
+          <p:cNvPicPr>
+            <a:picLocks noChangeAspect="1"/>
+          </p:cNvPicPr>
+          <p:nvPr/>
+        </p:nvPicPr>
+        <p:blipFill>
+          <a:blip r:embed="rId3"/>
+          <a:stretch>
+            <a:fillRect/>
+          </a:stretch>
+        </p:blipFill>
+        <p:spPr>
+          <a:xfrm>
+            <a:off x="5447922" y="1652343"/>
+            <a:ext cx="5306165" cy="2038635"/>
+          </a:xfrm>
+          <a:prstGeom prst="rect">
+            <a:avLst/>
+          </a:prstGeom>
+        </p:spPr>
+      </p:pic>
+      <p:pic>
+        <p:nvPicPr>
+          <p:cNvPr id="11" name="圖片 10">
+            <a:extLst>
+              <a:ext uri="{FF2B5EF4-FFF2-40B4-BE49-F238E27FC236}">
+                <a16:creationId xmlns:a16="http://schemas.microsoft.com/office/drawing/2014/main" id="{785ACC7D-BE2E-B0C0-8983-760BD7E75E52}"/>
+              </a:ext>
+            </a:extLst>
+          </p:cNvPr>
+          <p:cNvPicPr>
+            <a:picLocks noChangeAspect="1"/>
+          </p:cNvPicPr>
+          <p:nvPr/>
+        </p:nvPicPr>
+        <p:blipFill>
+          <a:blip r:embed="rId4"/>
+          <a:stretch>
+            <a:fillRect/>
+          </a:stretch>
+        </p:blipFill>
+        <p:spPr>
+          <a:xfrm>
+            <a:off x="6743567" y="3881363"/>
+            <a:ext cx="5439534" cy="819264"/>
+          </a:xfrm>
+          <a:prstGeom prst="rect">
+            <a:avLst/>
+          </a:prstGeom>
+        </p:spPr>
+      </p:pic>
+      <p:pic>
+        <p:nvPicPr>
+          <p:cNvPr id="13" name="圖片 12">
+            <a:extLst>
+              <a:ext uri="{FF2B5EF4-FFF2-40B4-BE49-F238E27FC236}">
+                <a16:creationId xmlns:a16="http://schemas.microsoft.com/office/drawing/2014/main" id="{363A740E-36D4-2F37-E21E-82FB4CFFC781}"/>
+              </a:ext>
+            </a:extLst>
+          </p:cNvPr>
+          <p:cNvPicPr>
+            <a:picLocks noChangeAspect="1"/>
+          </p:cNvPicPr>
+          <p:nvPr/>
+        </p:nvPicPr>
+        <p:blipFill>
+          <a:blip r:embed="rId5"/>
+          <a:stretch>
+            <a:fillRect/>
+          </a:stretch>
+        </p:blipFill>
+        <p:spPr>
+          <a:xfrm>
+            <a:off x="2761876" y="5036282"/>
+            <a:ext cx="3534268" cy="1629002"/>
+          </a:xfrm>
+          <a:prstGeom prst="rect">
+            <a:avLst/>
+          </a:prstGeom>
+        </p:spPr>
+      </p:pic>
+      <p:pic>
+        <p:nvPicPr>
+          <p:cNvPr id="14" name="Picture 3">
+            <a:extLst>
+              <a:ext uri="{FF2B5EF4-FFF2-40B4-BE49-F238E27FC236}">
+                <a16:creationId xmlns:a16="http://schemas.microsoft.com/office/drawing/2014/main" id="{12D8294D-551D-91A4-AA45-F85E478554A9}"/>
+              </a:ext>
+            </a:extLst>
+          </p:cNvPr>
+          <p:cNvPicPr>
+            <a:picLocks noChangeAspect="1"/>
+          </p:cNvPicPr>
+          <p:nvPr/>
+        </p:nvPicPr>
+        <p:blipFill>
+          <a:blip r:embed="rId6"/>
+          <a:srcRect r="22692"/>
+          <a:stretch/>
+        </p:blipFill>
+        <p:spPr>
+          <a:xfrm>
+            <a:off x="189754" y="1516731"/>
+            <a:ext cx="5144245" cy="3329166"/>
+          </a:xfrm>
+          <a:prstGeom prst="rect">
+            <a:avLst/>
+          </a:prstGeom>
+          <a:ln>
+            <a:noFill/>
+          </a:ln>
+          <a:effectLst>
+            <a:outerShdw blurRad="292100" dist="139700" dir="2700000" algn="tl" rotWithShape="0">
+              <a:srgbClr val="333333">
+                <a:alpha val="65000"/>
+              </a:srgbClr>
+            </a:outerShdw>
+          </a:effectLst>
+        </p:spPr>
+      </p:pic>
+      <p:sp>
+        <p:nvSpPr>
+          <p:cNvPr id="15" name="矩形 14">
+            <a:extLst>
+              <a:ext uri="{FF2B5EF4-FFF2-40B4-BE49-F238E27FC236}">
+                <a16:creationId xmlns:a16="http://schemas.microsoft.com/office/drawing/2014/main" id="{41C3F257-BA9C-7B18-7E21-C1CBABA36550}"/>
+              </a:ext>
+            </a:extLst>
+          </p:cNvPr>
+          <p:cNvSpPr/>
+          <p:nvPr/>
+        </p:nvSpPr>
+        <p:spPr>
+          <a:xfrm>
+            <a:off x="5638800" y="704850"/>
+            <a:ext cx="3067050" cy="514350"/>
+          </a:xfrm>
+          <a:prstGeom prst="rect">
+            <a:avLst/>
+          </a:prstGeom>
+          <a:noFill/>
+          <a:ln>
+            <a:solidFill>
+              <a:srgbClr val="FF0000"/>
+            </a:solidFill>
+          </a:ln>
+        </p:spPr>
+        <p:style>
+          <a:lnRef idx="2">
+            <a:schemeClr val="accent1">
+              <a:shade val="15000"/>
+            </a:schemeClr>
+          </a:lnRef>
+          <a:fillRef idx="1">
+            <a:schemeClr val="accent1"/>
+          </a:fillRef>
+          <a:effectRef idx="0">
+            <a:schemeClr val="accent1"/>
+          </a:effectRef>
+          <a:fontRef idx="minor">
+            <a:schemeClr val="lt1"/>
+          </a:fontRef>
+        </p:style>
+        <p:txBody>
+          <a:bodyPr rtlCol="0" anchor="ctr"/>
+          <a:lstStyle/>
+          <a:p>
+            <a:pPr algn="ctr"/>
+            <a:endParaRPr lang="zh-TW" altLang="en-US"/>
+          </a:p>
+        </p:txBody>
+      </p:sp>
+      <p:sp>
+        <p:nvSpPr>
+          <p:cNvPr id="16" name="矩形 15">
+            <a:extLst>
+              <a:ext uri="{FF2B5EF4-FFF2-40B4-BE49-F238E27FC236}">
+                <a16:creationId xmlns:a16="http://schemas.microsoft.com/office/drawing/2014/main" id="{130E3186-FA6A-A513-9723-E3315205A2F2}"/>
+              </a:ext>
+            </a:extLst>
+          </p:cNvPr>
+          <p:cNvSpPr/>
+          <p:nvPr/>
+        </p:nvSpPr>
+        <p:spPr>
+          <a:xfrm>
+            <a:off x="6410325" y="2028825"/>
+            <a:ext cx="3914775" cy="161925"/>
+          </a:xfrm>
+          <a:prstGeom prst="rect">
+            <a:avLst/>
+          </a:prstGeom>
+          <a:noFill/>
+          <a:ln>
+            <a:solidFill>
+              <a:srgbClr val="FF0000"/>
+            </a:solidFill>
+          </a:ln>
+        </p:spPr>
+        <p:style>
+          <a:lnRef idx="2">
+            <a:schemeClr val="accent1">
+              <a:shade val="15000"/>
+            </a:schemeClr>
+          </a:lnRef>
+          <a:fillRef idx="1">
+            <a:schemeClr val="accent1"/>
+          </a:fillRef>
+          <a:effectRef idx="0">
+            <a:schemeClr val="accent1"/>
+          </a:effectRef>
+          <a:fontRef idx="minor">
+            <a:schemeClr val="lt1"/>
+          </a:fontRef>
+        </p:style>
+        <p:txBody>
+          <a:bodyPr rtlCol="0" anchor="ctr"/>
+          <a:lstStyle/>
+          <a:p>
+            <a:pPr algn="ctr"/>
+            <a:endParaRPr lang="zh-TW" altLang="en-US"/>
+          </a:p>
+        </p:txBody>
+      </p:sp>
+      <p:sp>
+        <p:nvSpPr>
+          <p:cNvPr id="17" name="矩形 16">
+            <a:extLst>
+              <a:ext uri="{FF2B5EF4-FFF2-40B4-BE49-F238E27FC236}">
+                <a16:creationId xmlns:a16="http://schemas.microsoft.com/office/drawing/2014/main" id="{79215E1B-7673-24AC-3BC2-547472907B9A}"/>
+              </a:ext>
+            </a:extLst>
+          </p:cNvPr>
+          <p:cNvSpPr/>
+          <p:nvPr/>
+        </p:nvSpPr>
+        <p:spPr>
+          <a:xfrm>
+            <a:off x="5638800" y="2190750"/>
+            <a:ext cx="1933575" cy="190385"/>
+          </a:xfrm>
+          <a:prstGeom prst="rect">
+            <a:avLst/>
+          </a:prstGeom>
+          <a:noFill/>
+          <a:ln>
+            <a:solidFill>
+              <a:srgbClr val="FF0000"/>
+            </a:solidFill>
+          </a:ln>
+        </p:spPr>
+        <p:style>
+          <a:lnRef idx="2">
+            <a:schemeClr val="accent1">
+              <a:shade val="15000"/>
+            </a:schemeClr>
+          </a:lnRef>
+          <a:fillRef idx="1">
+            <a:schemeClr val="accent1"/>
+          </a:fillRef>
+          <a:effectRef idx="0">
+            <a:schemeClr val="accent1"/>
+          </a:effectRef>
+          <a:fontRef idx="minor">
+            <a:schemeClr val="lt1"/>
+          </a:fontRef>
+        </p:style>
+        <p:txBody>
+          <a:bodyPr rtlCol="0" anchor="ctr"/>
+          <a:lstStyle/>
+          <a:p>
+            <a:pPr algn="ctr"/>
+            <a:endParaRPr lang="zh-TW" altLang="en-US"/>
+          </a:p>
+        </p:txBody>
+      </p:sp>
+      <p:sp>
+        <p:nvSpPr>
+          <p:cNvPr id="18" name="矩形 17">
+            <a:extLst>
+              <a:ext uri="{FF2B5EF4-FFF2-40B4-BE49-F238E27FC236}">
+                <a16:creationId xmlns:a16="http://schemas.microsoft.com/office/drawing/2014/main" id="{21B0574B-D341-1818-E6EB-688888068C41}"/>
+              </a:ext>
+            </a:extLst>
+          </p:cNvPr>
+          <p:cNvSpPr/>
+          <p:nvPr/>
+        </p:nvSpPr>
+        <p:spPr>
+          <a:xfrm>
+            <a:off x="5638800" y="3000375"/>
+            <a:ext cx="2057400" cy="190385"/>
+          </a:xfrm>
+          <a:prstGeom prst="rect">
+            <a:avLst/>
+          </a:prstGeom>
+          <a:noFill/>
+          <a:ln>
+            <a:solidFill>
+              <a:srgbClr val="FF0000"/>
+            </a:solidFill>
+          </a:ln>
+        </p:spPr>
+        <p:style>
+          <a:lnRef idx="2">
+            <a:schemeClr val="accent1">
+              <a:shade val="15000"/>
+            </a:schemeClr>
+          </a:lnRef>
+          <a:fillRef idx="1">
+            <a:schemeClr val="accent1"/>
+          </a:fillRef>
+          <a:effectRef idx="0">
+            <a:schemeClr val="accent1"/>
+          </a:effectRef>
+          <a:fontRef idx="minor">
+            <a:schemeClr val="lt1"/>
+          </a:fontRef>
+        </p:style>
+        <p:txBody>
+          <a:bodyPr rtlCol="0" anchor="ctr"/>
+          <a:lstStyle/>
+          <a:p>
+            <a:pPr algn="ctr"/>
+            <a:endParaRPr lang="zh-TW" altLang="en-US"/>
+          </a:p>
+        </p:txBody>
+      </p:sp>
+      <p:sp>
+        <p:nvSpPr>
+          <p:cNvPr id="19" name="矩形 18">
+            <a:extLst>
+              <a:ext uri="{FF2B5EF4-FFF2-40B4-BE49-F238E27FC236}">
+                <a16:creationId xmlns:a16="http://schemas.microsoft.com/office/drawing/2014/main" id="{FF65A78A-AC47-C878-6315-E5A71CCE0761}"/>
+              </a:ext>
+            </a:extLst>
+          </p:cNvPr>
+          <p:cNvSpPr/>
+          <p:nvPr/>
+        </p:nvSpPr>
+        <p:spPr>
+          <a:xfrm>
+            <a:off x="5638800" y="3352800"/>
+            <a:ext cx="323850" cy="190385"/>
+          </a:xfrm>
+          <a:prstGeom prst="rect">
+            <a:avLst/>
+          </a:prstGeom>
+          <a:noFill/>
+          <a:ln>
+            <a:solidFill>
+              <a:srgbClr val="FF0000"/>
+            </a:solidFill>
+          </a:ln>
+        </p:spPr>
+        <p:style>
+          <a:lnRef idx="2">
+            <a:schemeClr val="accent1">
+              <a:shade val="15000"/>
+            </a:schemeClr>
+          </a:lnRef>
+          <a:fillRef idx="1">
+            <a:schemeClr val="accent1"/>
+          </a:fillRef>
+          <a:effectRef idx="0">
+            <a:schemeClr val="accent1"/>
+          </a:effectRef>
+          <a:fontRef idx="minor">
+            <a:schemeClr val="lt1"/>
+          </a:fontRef>
+        </p:style>
+        <p:txBody>
+          <a:bodyPr rtlCol="0" anchor="ctr"/>
+          <a:lstStyle/>
+          <a:p>
+            <a:pPr algn="ctr"/>
+            <a:endParaRPr lang="zh-TW" altLang="en-US"/>
+          </a:p>
+        </p:txBody>
+      </p:sp>
+      <p:pic>
+        <p:nvPicPr>
+          <p:cNvPr id="22" name="圖片 21">
+            <a:extLst>
+              <a:ext uri="{FF2B5EF4-FFF2-40B4-BE49-F238E27FC236}">
+                <a16:creationId xmlns:a16="http://schemas.microsoft.com/office/drawing/2014/main" id="{D49D73ED-2E1A-572B-C6D7-E5E53C0019D8}"/>
+              </a:ext>
+            </a:extLst>
+          </p:cNvPr>
+          <p:cNvPicPr>
+            <a:picLocks noChangeAspect="1"/>
+          </p:cNvPicPr>
+          <p:nvPr/>
+        </p:nvPicPr>
+        <p:blipFill>
+          <a:blip r:embed="rId7"/>
+          <a:stretch>
+            <a:fillRect/>
+          </a:stretch>
+        </p:blipFill>
+        <p:spPr>
+          <a:xfrm>
+            <a:off x="6743567" y="4700627"/>
+            <a:ext cx="3534268" cy="1728625"/>
+          </a:xfrm>
+          <a:prstGeom prst="rect">
+            <a:avLst/>
+          </a:prstGeom>
+        </p:spPr>
+      </p:pic>
+      <p:sp>
+        <p:nvSpPr>
+          <p:cNvPr id="23" name="矩形 22">
+            <a:extLst>
+              <a:ext uri="{FF2B5EF4-FFF2-40B4-BE49-F238E27FC236}">
+                <a16:creationId xmlns:a16="http://schemas.microsoft.com/office/drawing/2014/main" id="{F7F66E61-0FE3-EE44-D0EA-9D4081C9CDDD}"/>
+              </a:ext>
+            </a:extLst>
+          </p:cNvPr>
+          <p:cNvSpPr/>
+          <p:nvPr/>
+        </p:nvSpPr>
+        <p:spPr>
+          <a:xfrm>
+            <a:off x="6829425" y="5381625"/>
+            <a:ext cx="3381375" cy="1047627"/>
+          </a:xfrm>
+          <a:prstGeom prst="rect">
+            <a:avLst/>
+          </a:prstGeom>
+          <a:noFill/>
+          <a:ln>
+            <a:solidFill>
+              <a:srgbClr val="FF0000"/>
+            </a:solidFill>
+          </a:ln>
+        </p:spPr>
+        <p:style>
+          <a:lnRef idx="2">
+            <a:schemeClr val="accent1">
+              <a:shade val="15000"/>
+            </a:schemeClr>
+          </a:lnRef>
+          <a:fillRef idx="1">
+            <a:schemeClr val="accent1"/>
+          </a:fillRef>
+          <a:effectRef idx="0">
+            <a:schemeClr val="accent1"/>
+          </a:effectRef>
+          <a:fontRef idx="minor">
+            <a:schemeClr val="lt1"/>
+          </a:fontRef>
+        </p:style>
+        <p:txBody>
+          <a:bodyPr rtlCol="0" anchor="ctr"/>
+          <a:lstStyle/>
+          <a:p>
+            <a:pPr algn="ctr"/>
+            <a:endParaRPr lang="zh-TW" altLang="en-US"/>
+          </a:p>
+        </p:txBody>
+      </p:sp>
+      <p:sp>
+        <p:nvSpPr>
+          <p:cNvPr id="24" name="矩形 23">
+            <a:extLst>
+              <a:ext uri="{FF2B5EF4-FFF2-40B4-BE49-F238E27FC236}">
+                <a16:creationId xmlns:a16="http://schemas.microsoft.com/office/drawing/2014/main" id="{94FDB660-9526-FD05-3793-76A9B6635B7F}"/>
+              </a:ext>
+            </a:extLst>
+          </p:cNvPr>
+          <p:cNvSpPr/>
+          <p:nvPr/>
+        </p:nvSpPr>
+        <p:spPr>
+          <a:xfrm>
+            <a:off x="2828925" y="5465137"/>
+            <a:ext cx="3467219" cy="1116638"/>
+          </a:xfrm>
+          <a:prstGeom prst="rect">
+            <a:avLst/>
+          </a:prstGeom>
+          <a:noFill/>
+          <a:ln>
+            <a:solidFill>
+              <a:srgbClr val="FF0000"/>
+            </a:solidFill>
+          </a:ln>
+        </p:spPr>
+        <p:style>
+          <a:lnRef idx="2">
+            <a:schemeClr val="accent1">
+              <a:shade val="15000"/>
+            </a:schemeClr>
+          </a:lnRef>
+          <a:fillRef idx="1">
+            <a:schemeClr val="accent1"/>
+          </a:fillRef>
+          <a:effectRef idx="0">
+            <a:schemeClr val="accent1"/>
+          </a:effectRef>
+          <a:fontRef idx="minor">
+            <a:schemeClr val="lt1"/>
+          </a:fontRef>
+        </p:style>
+        <p:txBody>
+          <a:bodyPr rtlCol="0" anchor="ctr"/>
+          <a:lstStyle/>
+          <a:p>
+            <a:pPr algn="ctr"/>
+            <a:endParaRPr lang="zh-TW" altLang="en-US"/>
+          </a:p>
+        </p:txBody>
+      </p:sp>
+    </p:spTree>
+    <p:extLst>
+      <p:ext uri="{BB962C8B-B14F-4D97-AF65-F5344CB8AC3E}">
+        <p14:creationId xmlns:p14="http://schemas.microsoft.com/office/powerpoint/2010/main" val="144842606"/>
+      </p:ext>
+    </p:extLst>
+  </p:cSld>
+  <p:clrMapOvr>
+    <a:masterClrMapping/>
+  </p:clrMapOvr>
+</p:sld>
+</file>
+
+<file path=ppt/slides/slide5.xml><?xml version="1.0" encoding="utf-8"?>
+<p:sld xmlns:a="http://schemas.openxmlformats.org/drawingml/2006/main" xmlns:r="http://schemas.openxmlformats.org/officeDocument/2006/relationships" xmlns:p="http://schemas.openxmlformats.org/presentationml/2006/main">
+  <p:cSld>
+    <p:spTree>
+      <p:nvGrpSpPr>
+        <p:cNvPr id="1" name=""/>
+        <p:cNvGrpSpPr/>
+        <p:nvPr/>
+      </p:nvGrpSpPr>
+      <p:grpSpPr>
+        <a:xfrm>
+          <a:off x="0" y="0"/>
+          <a:ext cx="0" cy="0"/>
+          <a:chOff x="0" y="0"/>
+          <a:chExt cx="0" cy="0"/>
+        </a:xfrm>
+      </p:grpSpPr>
+      <p:pic>
+        <p:nvPicPr>
+          <p:cNvPr id="3" name="圖片 2">
+            <a:extLst>
+              <a:ext uri="{FF2B5EF4-FFF2-40B4-BE49-F238E27FC236}">
+                <a16:creationId xmlns:a16="http://schemas.microsoft.com/office/drawing/2014/main" id="{6003457A-1D22-B9A2-6D3C-94B4BBB202A6}"/>
+              </a:ext>
+            </a:extLst>
+          </p:cNvPr>
+          <p:cNvPicPr>
+            <a:picLocks noChangeAspect="1"/>
+          </p:cNvPicPr>
+          <p:nvPr/>
+        </p:nvPicPr>
+        <p:blipFill>
+          <a:blip r:embed="rId2"/>
+          <a:stretch>
+            <a:fillRect/>
+          </a:stretch>
+        </p:blipFill>
+        <p:spPr>
+          <a:xfrm>
+            <a:off x="363359" y="691847"/>
+            <a:ext cx="6890881" cy="1718101"/>
+          </a:xfrm>
+          <a:prstGeom prst="rect">
+            <a:avLst/>
+          </a:prstGeom>
+        </p:spPr>
+      </p:pic>
+      <p:sp>
+        <p:nvSpPr>
+          <p:cNvPr id="5" name="文字方塊 4">
+            <a:extLst>
+              <a:ext uri="{FF2B5EF4-FFF2-40B4-BE49-F238E27FC236}">
+                <a16:creationId xmlns:a16="http://schemas.microsoft.com/office/drawing/2014/main" id="{D56559F3-1CE4-329C-A5B3-438E7B71A0B7}"/>
+              </a:ext>
+            </a:extLst>
+          </p:cNvPr>
+          <p:cNvSpPr txBox="1"/>
+          <p:nvPr/>
+        </p:nvSpPr>
+        <p:spPr>
+          <a:xfrm>
+            <a:off x="363359" y="3057525"/>
+            <a:ext cx="3962400" cy="1200329"/>
+          </a:xfrm>
+          <a:prstGeom prst="rect">
+            <a:avLst/>
+          </a:prstGeom>
+          <a:noFill/>
+        </p:spPr>
+        <p:txBody>
+          <a:bodyPr wrap="square" rtlCol="0">
+            <a:spAutoFit/>
+          </a:bodyPr>
+          <a:lstStyle/>
+          <a:p>
+            <a:r>
+              <a:rPr lang="en-US" altLang="zh-TW" dirty="0"/>
+              <a:t>input</a:t>
+            </a:r>
+            <a:r>
+              <a:rPr lang="zh-TW" altLang="en-US" dirty="0"/>
+              <a:t>輸入</a:t>
+            </a:r>
+            <a:endParaRPr lang="en-US" altLang="zh-TW" dirty="0"/>
+          </a:p>
+          <a:p>
+            <a:r>
+              <a:rPr lang="en-US" altLang="zh-TW" dirty="0"/>
+              <a:t>//</a:t>
+            </a:r>
+            <a:r>
+              <a:rPr lang="zh-TW" altLang="en-US" dirty="0"/>
+              <a:t>整除</a:t>
+            </a:r>
+            <a:endParaRPr lang="en-US" altLang="zh-TW" dirty="0"/>
+          </a:p>
+          <a:p>
+            <a:r>
+              <a:rPr lang="en-US" altLang="zh-TW" dirty="0"/>
+              <a:t>%</a:t>
+            </a:r>
+            <a:r>
+              <a:rPr lang="zh-TW" altLang="en-US" dirty="0"/>
+              <a:t>取餘數</a:t>
+            </a:r>
+            <a:endParaRPr lang="en-US" altLang="zh-TW" dirty="0"/>
+          </a:p>
+          <a:p>
+            <a:r>
+              <a:rPr lang="en-US" altLang="zh-TW" dirty="0"/>
+              <a:t>.format()</a:t>
+            </a:r>
+            <a:r>
+              <a:rPr lang="zh-TW" altLang="en-US" dirty="0"/>
+              <a:t>把字串輸入到</a:t>
+            </a:r>
+            <a:r>
+              <a:rPr lang="en-US" altLang="zh-TW" dirty="0"/>
+              <a:t>{}</a:t>
+            </a:r>
+            <a:r>
+              <a:rPr lang="zh-TW" altLang="en-US" dirty="0"/>
+              <a:t>裡</a:t>
+            </a:r>
+          </a:p>
+        </p:txBody>
+      </p:sp>
+    </p:spTree>
+    <p:extLst>
+      <p:ext uri="{BB962C8B-B14F-4D97-AF65-F5344CB8AC3E}">
+        <p14:creationId xmlns:p14="http://schemas.microsoft.com/office/powerpoint/2010/main" val="2925284954"/>
       </p:ext>
     </p:extLst>
   </p:cSld>

--- a/網站與簡報/note.pptx
+++ b/網站與簡報/note.pptx
@@ -10,6 +10,10 @@
     <p:sldId id="259" r:id="rId4"/>
     <p:sldId id="260" r:id="rId5"/>
     <p:sldId id="261" r:id="rId6"/>
+    <p:sldId id="262" r:id="rId7"/>
+    <p:sldId id="264" r:id="rId8"/>
+    <p:sldId id="265" r:id="rId9"/>
+    <p:sldId id="266" r:id="rId10"/>
   </p:sldIdLst>
   <p:sldSz cx="12192000" cy="6858000"/>
   <p:notesSz cx="6858000" cy="9144000"/>
@@ -263,7 +267,7 @@
           <a:p>
             <a:fld id="{42C1CF02-BC93-4CFC-8444-C1F68E6A339F}" type="datetimeFigureOut">
               <a:rPr lang="zh-TW" altLang="en-US" smtClean="0"/>
-              <a:t>2026/3/5</a:t>
+              <a:t>2026/3/9</a:t>
             </a:fld>
             <a:endParaRPr lang="zh-TW" altLang="en-US"/>
           </a:p>
@@ -461,7 +465,7 @@
           <a:p>
             <a:fld id="{42C1CF02-BC93-4CFC-8444-C1F68E6A339F}" type="datetimeFigureOut">
               <a:rPr lang="zh-TW" altLang="en-US" smtClean="0"/>
-              <a:t>2026/3/5</a:t>
+              <a:t>2026/3/9</a:t>
             </a:fld>
             <a:endParaRPr lang="zh-TW" altLang="en-US"/>
           </a:p>
@@ -669,7 +673,7 @@
           <a:p>
             <a:fld id="{42C1CF02-BC93-4CFC-8444-C1F68E6A339F}" type="datetimeFigureOut">
               <a:rPr lang="zh-TW" altLang="en-US" smtClean="0"/>
-              <a:t>2026/3/5</a:t>
+              <a:t>2026/3/9</a:t>
             </a:fld>
             <a:endParaRPr lang="zh-TW" altLang="en-US"/>
           </a:p>
@@ -867,7 +871,7 @@
           <a:p>
             <a:fld id="{42C1CF02-BC93-4CFC-8444-C1F68E6A339F}" type="datetimeFigureOut">
               <a:rPr lang="zh-TW" altLang="en-US" smtClean="0"/>
-              <a:t>2026/3/5</a:t>
+              <a:t>2026/3/9</a:t>
             </a:fld>
             <a:endParaRPr lang="zh-TW" altLang="en-US"/>
           </a:p>
@@ -1142,7 +1146,7 @@
           <a:p>
             <a:fld id="{42C1CF02-BC93-4CFC-8444-C1F68E6A339F}" type="datetimeFigureOut">
               <a:rPr lang="zh-TW" altLang="en-US" smtClean="0"/>
-              <a:t>2026/3/5</a:t>
+              <a:t>2026/3/9</a:t>
             </a:fld>
             <a:endParaRPr lang="zh-TW" altLang="en-US"/>
           </a:p>
@@ -1407,7 +1411,7 @@
           <a:p>
             <a:fld id="{42C1CF02-BC93-4CFC-8444-C1F68E6A339F}" type="datetimeFigureOut">
               <a:rPr lang="zh-TW" altLang="en-US" smtClean="0"/>
-              <a:t>2026/3/5</a:t>
+              <a:t>2026/3/9</a:t>
             </a:fld>
             <a:endParaRPr lang="zh-TW" altLang="en-US"/>
           </a:p>
@@ -1819,7 +1823,7 @@
           <a:p>
             <a:fld id="{42C1CF02-BC93-4CFC-8444-C1F68E6A339F}" type="datetimeFigureOut">
               <a:rPr lang="zh-TW" altLang="en-US" smtClean="0"/>
-              <a:t>2026/3/5</a:t>
+              <a:t>2026/3/9</a:t>
             </a:fld>
             <a:endParaRPr lang="zh-TW" altLang="en-US"/>
           </a:p>
@@ -1960,7 +1964,7 @@
           <a:p>
             <a:fld id="{42C1CF02-BC93-4CFC-8444-C1F68E6A339F}" type="datetimeFigureOut">
               <a:rPr lang="zh-TW" altLang="en-US" smtClean="0"/>
-              <a:t>2026/3/5</a:t>
+              <a:t>2026/3/9</a:t>
             </a:fld>
             <a:endParaRPr lang="zh-TW" altLang="en-US"/>
           </a:p>
@@ -2073,7 +2077,7 @@
           <a:p>
             <a:fld id="{42C1CF02-BC93-4CFC-8444-C1F68E6A339F}" type="datetimeFigureOut">
               <a:rPr lang="zh-TW" altLang="en-US" smtClean="0"/>
-              <a:t>2026/3/5</a:t>
+              <a:t>2026/3/9</a:t>
             </a:fld>
             <a:endParaRPr lang="zh-TW" altLang="en-US"/>
           </a:p>
@@ -2384,7 +2388,7 @@
           <a:p>
             <a:fld id="{42C1CF02-BC93-4CFC-8444-C1F68E6A339F}" type="datetimeFigureOut">
               <a:rPr lang="zh-TW" altLang="en-US" smtClean="0"/>
-              <a:t>2026/3/5</a:t>
+              <a:t>2026/3/9</a:t>
             </a:fld>
             <a:endParaRPr lang="zh-TW" altLang="en-US"/>
           </a:p>
@@ -2672,7 +2676,7 @@
           <a:p>
             <a:fld id="{42C1CF02-BC93-4CFC-8444-C1F68E6A339F}" type="datetimeFigureOut">
               <a:rPr lang="zh-TW" altLang="en-US" smtClean="0"/>
-              <a:t>2026/3/5</a:t>
+              <a:t>2026/3/9</a:t>
             </a:fld>
             <a:endParaRPr lang="zh-TW" altLang="en-US"/>
           </a:p>
@@ -2913,7 +2917,7 @@
           <a:p>
             <a:fld id="{42C1CF02-BC93-4CFC-8444-C1F68E6A339F}" type="datetimeFigureOut">
               <a:rPr lang="zh-TW" altLang="en-US" smtClean="0"/>
-              <a:t>2026/3/5</a:t>
+              <a:t>2026/3/9</a:t>
             </a:fld>
             <a:endParaRPr lang="zh-TW" altLang="en-US"/>
           </a:p>
@@ -3399,6 +3403,42 @@
           </a:effectLst>
         </p:spPr>
       </p:pic>
+      <p:sp>
+        <p:nvSpPr>
+          <p:cNvPr id="2" name="文字方塊 1">
+            <a:extLst>
+              <a:ext uri="{FF2B5EF4-FFF2-40B4-BE49-F238E27FC236}">
+                <a16:creationId xmlns:a16="http://schemas.microsoft.com/office/drawing/2014/main" id="{7E72CD84-A2CB-66F4-E195-2024EF6DE9F8}"/>
+              </a:ext>
+            </a:extLst>
+          </p:cNvPr>
+          <p:cNvSpPr txBox="1"/>
+          <p:nvPr/>
+        </p:nvSpPr>
+        <p:spPr>
+          <a:xfrm>
+            <a:off x="7391400" y="2266950"/>
+            <a:ext cx="857250" cy="381000"/>
+          </a:xfrm>
+          <a:prstGeom prst="rect">
+            <a:avLst/>
+          </a:prstGeom>
+          <a:noFill/>
+        </p:spPr>
+        <p:txBody>
+          <a:bodyPr wrap="square" rtlCol="0">
+            <a:spAutoFit/>
+          </a:bodyPr>
+          <a:lstStyle/>
+          <a:p>
+            <a:r>
+              <a:rPr lang="en-US" altLang="zh-TW" dirty="0"/>
+              <a:t>p34</a:t>
+            </a:r>
+            <a:endParaRPr lang="zh-TW" altLang="en-US" dirty="0"/>
+          </a:p>
+        </p:txBody>
+      </p:sp>
     </p:spTree>
     <p:extLst>
       <p:ext uri="{BB962C8B-B14F-4D97-AF65-F5344CB8AC3E}">
@@ -3711,6 +3751,42 @@
           <a:p>
             <a:pPr algn="ctr"/>
             <a:endParaRPr lang="zh-TW" altLang="en-US"/>
+          </a:p>
+        </p:txBody>
+      </p:sp>
+      <p:sp>
+        <p:nvSpPr>
+          <p:cNvPr id="3" name="文字方塊 2">
+            <a:extLst>
+              <a:ext uri="{FF2B5EF4-FFF2-40B4-BE49-F238E27FC236}">
+                <a16:creationId xmlns:a16="http://schemas.microsoft.com/office/drawing/2014/main" id="{57C82DC9-1028-E7CF-0705-755BE0B47500}"/>
+              </a:ext>
+            </a:extLst>
+          </p:cNvPr>
+          <p:cNvSpPr txBox="1"/>
+          <p:nvPr/>
+        </p:nvSpPr>
+        <p:spPr>
+          <a:xfrm>
+            <a:off x="6605732" y="373221"/>
+            <a:ext cx="857250" cy="381000"/>
+          </a:xfrm>
+          <a:prstGeom prst="rect">
+            <a:avLst/>
+          </a:prstGeom>
+          <a:noFill/>
+        </p:spPr>
+        <p:txBody>
+          <a:bodyPr wrap="square" rtlCol="0">
+            <a:spAutoFit/>
+          </a:bodyPr>
+          <a:lstStyle/>
+          <a:p>
+            <a:r>
+              <a:rPr lang="en-US" altLang="zh-TW" dirty="0"/>
+              <a:t>p36</a:t>
+            </a:r>
+            <a:endParaRPr lang="zh-TW" altLang="en-US" dirty="0"/>
           </a:p>
         </p:txBody>
       </p:sp>
@@ -4417,6 +4493,42 @@
           </a:p>
         </p:txBody>
       </p:sp>
+      <p:sp>
+        <p:nvSpPr>
+          <p:cNvPr id="2" name="文字方塊 1">
+            <a:extLst>
+              <a:ext uri="{FF2B5EF4-FFF2-40B4-BE49-F238E27FC236}">
+                <a16:creationId xmlns:a16="http://schemas.microsoft.com/office/drawing/2014/main" id="{C4FE0574-7A0A-C01E-DD6D-F08A42E2ECB6}"/>
+              </a:ext>
+            </a:extLst>
+          </p:cNvPr>
+          <p:cNvSpPr txBox="1"/>
+          <p:nvPr/>
+        </p:nvSpPr>
+        <p:spPr>
+          <a:xfrm>
+            <a:off x="1171575" y="385483"/>
+            <a:ext cx="857250" cy="381000"/>
+          </a:xfrm>
+          <a:prstGeom prst="rect">
+            <a:avLst/>
+          </a:prstGeom>
+          <a:noFill/>
+        </p:spPr>
+        <p:txBody>
+          <a:bodyPr wrap="square" rtlCol="0">
+            <a:spAutoFit/>
+          </a:bodyPr>
+          <a:lstStyle/>
+          <a:p>
+            <a:r>
+              <a:rPr lang="en-US" altLang="zh-TW" dirty="0"/>
+              <a:t>p37</a:t>
+            </a:r>
+            <a:endParaRPr lang="zh-TW" altLang="en-US" dirty="0"/>
+          </a:p>
+        </p:txBody>
+      </p:sp>
     </p:spTree>
     <p:extLst>
       <p:ext uri="{BB962C8B-B14F-4D97-AF65-F5344CB8AC3E}">
@@ -4557,10 +4669,1751 @@
           </a:p>
         </p:txBody>
       </p:sp>
+      <p:sp>
+        <p:nvSpPr>
+          <p:cNvPr id="2" name="文字方塊 1">
+            <a:extLst>
+              <a:ext uri="{FF2B5EF4-FFF2-40B4-BE49-F238E27FC236}">
+                <a16:creationId xmlns:a16="http://schemas.microsoft.com/office/drawing/2014/main" id="{35347413-5E86-FBD7-2677-E9346FAD6E31}"/>
+              </a:ext>
+            </a:extLst>
+          </p:cNvPr>
+          <p:cNvSpPr txBox="1"/>
+          <p:nvPr/>
+        </p:nvSpPr>
+        <p:spPr>
+          <a:xfrm>
+            <a:off x="7797800" y="2225282"/>
+            <a:ext cx="1168400" cy="369332"/>
+          </a:xfrm>
+          <a:prstGeom prst="rect">
+            <a:avLst/>
+          </a:prstGeom>
+          <a:noFill/>
+        </p:spPr>
+        <p:txBody>
+          <a:bodyPr wrap="square" rtlCol="0">
+            <a:spAutoFit/>
+          </a:bodyPr>
+          <a:lstStyle/>
+          <a:p>
+            <a:r>
+              <a:rPr lang="en-US" altLang="zh-TW" dirty="0"/>
+              <a:t>practice1</a:t>
+            </a:r>
+            <a:endParaRPr lang="zh-TW" altLang="en-US" dirty="0"/>
+          </a:p>
+        </p:txBody>
+      </p:sp>
     </p:spTree>
     <p:extLst>
       <p:ext uri="{BB962C8B-B14F-4D97-AF65-F5344CB8AC3E}">
         <p14:creationId xmlns:p14="http://schemas.microsoft.com/office/powerpoint/2010/main" val="2925284954"/>
+      </p:ext>
+    </p:extLst>
+  </p:cSld>
+  <p:clrMapOvr>
+    <a:masterClrMapping/>
+  </p:clrMapOvr>
+</p:sld>
+</file>
+
+<file path=ppt/slides/slide6.xml><?xml version="1.0" encoding="utf-8"?>
+<p:sld xmlns:a="http://schemas.openxmlformats.org/drawingml/2006/main" xmlns:r="http://schemas.openxmlformats.org/officeDocument/2006/relationships" xmlns:p="http://schemas.openxmlformats.org/presentationml/2006/main">
+  <p:cSld>
+    <p:spTree>
+      <p:nvGrpSpPr>
+        <p:cNvPr id="1" name="">
+          <a:extLst>
+            <a:ext uri="{FF2B5EF4-FFF2-40B4-BE49-F238E27FC236}">
+              <a16:creationId xmlns:a16="http://schemas.microsoft.com/office/drawing/2014/main" id="{1758EC79-9022-42D1-3629-23733E34EAFE}"/>
+            </a:ext>
+          </a:extLst>
+        </p:cNvPr>
+        <p:cNvGrpSpPr/>
+        <p:nvPr/>
+      </p:nvGrpSpPr>
+      <p:grpSpPr>
+        <a:xfrm>
+          <a:off x="0" y="0"/>
+          <a:ext cx="0" cy="0"/>
+          <a:chOff x="0" y="0"/>
+          <a:chExt cx="0" cy="0"/>
+        </a:xfrm>
+      </p:grpSpPr>
+      <p:sp>
+        <p:nvSpPr>
+          <p:cNvPr id="5" name="文字方塊 4">
+            <a:extLst>
+              <a:ext uri="{FF2B5EF4-FFF2-40B4-BE49-F238E27FC236}">
+                <a16:creationId xmlns:a16="http://schemas.microsoft.com/office/drawing/2014/main" id="{CF83840E-0139-0527-F78D-2108457ECA00}"/>
+              </a:ext>
+            </a:extLst>
+          </p:cNvPr>
+          <p:cNvSpPr txBox="1"/>
+          <p:nvPr/>
+        </p:nvSpPr>
+        <p:spPr>
+          <a:xfrm>
+            <a:off x="4145507" y="2309419"/>
+            <a:ext cx="1576629" cy="369332"/>
+          </a:xfrm>
+          <a:prstGeom prst="rect">
+            <a:avLst/>
+          </a:prstGeom>
+          <a:noFill/>
+        </p:spPr>
+        <p:txBody>
+          <a:bodyPr wrap="square" rtlCol="0">
+            <a:spAutoFit/>
+          </a:bodyPr>
+          <a:lstStyle/>
+          <a:p>
+            <a:r>
+              <a:rPr lang="zh-TW" altLang="en-US" dirty="0"/>
+              <a:t>輸出</a:t>
+            </a:r>
+            <a:endParaRPr lang="en-US" altLang="zh-TW" dirty="0"/>
+          </a:p>
+        </p:txBody>
+      </p:sp>
+      <p:sp>
+        <p:nvSpPr>
+          <p:cNvPr id="2" name="文字方塊 1">
+            <a:extLst>
+              <a:ext uri="{FF2B5EF4-FFF2-40B4-BE49-F238E27FC236}">
+                <a16:creationId xmlns:a16="http://schemas.microsoft.com/office/drawing/2014/main" id="{6B0E1EBB-7CCE-C872-E2AB-1AC7524963B6}"/>
+              </a:ext>
+            </a:extLst>
+          </p:cNvPr>
+          <p:cNvSpPr txBox="1"/>
+          <p:nvPr/>
+        </p:nvSpPr>
+        <p:spPr>
+          <a:xfrm>
+            <a:off x="10274300" y="278116"/>
+            <a:ext cx="1168400" cy="369332"/>
+          </a:xfrm>
+          <a:prstGeom prst="rect">
+            <a:avLst/>
+          </a:prstGeom>
+          <a:noFill/>
+        </p:spPr>
+        <p:txBody>
+          <a:bodyPr wrap="square" rtlCol="0">
+            <a:spAutoFit/>
+          </a:bodyPr>
+          <a:lstStyle/>
+          <a:p>
+            <a:r>
+              <a:rPr lang="en-US" altLang="zh-TW" dirty="0"/>
+              <a:t>p46</a:t>
+            </a:r>
+            <a:endParaRPr lang="zh-TW" altLang="en-US" dirty="0"/>
+          </a:p>
+        </p:txBody>
+      </p:sp>
+      <p:pic>
+        <p:nvPicPr>
+          <p:cNvPr id="6" name="圖片 5">
+            <a:extLst>
+              <a:ext uri="{FF2B5EF4-FFF2-40B4-BE49-F238E27FC236}">
+                <a16:creationId xmlns:a16="http://schemas.microsoft.com/office/drawing/2014/main" id="{EB85B7E9-D5BF-9386-AA00-874556A33998}"/>
+              </a:ext>
+            </a:extLst>
+          </p:cNvPr>
+          <p:cNvPicPr>
+            <a:picLocks noChangeAspect="1"/>
+          </p:cNvPicPr>
+          <p:nvPr/>
+        </p:nvPicPr>
+        <p:blipFill>
+          <a:blip r:embed="rId2"/>
+          <a:stretch>
+            <a:fillRect/>
+          </a:stretch>
+        </p:blipFill>
+        <p:spPr>
+          <a:xfrm>
+            <a:off x="303188" y="1294116"/>
+            <a:ext cx="3458058" cy="4810796"/>
+          </a:xfrm>
+          <a:prstGeom prst="rect">
+            <a:avLst/>
+          </a:prstGeom>
+        </p:spPr>
+      </p:pic>
+      <p:pic>
+        <p:nvPicPr>
+          <p:cNvPr id="8" name="圖片 7">
+            <a:extLst>
+              <a:ext uri="{FF2B5EF4-FFF2-40B4-BE49-F238E27FC236}">
+                <a16:creationId xmlns:a16="http://schemas.microsoft.com/office/drawing/2014/main" id="{BF56BC21-C219-54FC-0F40-10D949B8F999}"/>
+              </a:ext>
+            </a:extLst>
+          </p:cNvPr>
+          <p:cNvPicPr>
+            <a:picLocks noChangeAspect="1"/>
+          </p:cNvPicPr>
+          <p:nvPr/>
+        </p:nvPicPr>
+        <p:blipFill>
+          <a:blip r:embed="rId3"/>
+          <a:stretch>
+            <a:fillRect/>
+          </a:stretch>
+        </p:blipFill>
+        <p:spPr>
+          <a:xfrm>
+            <a:off x="4145507" y="2760911"/>
+            <a:ext cx="2823276" cy="2132205"/>
+          </a:xfrm>
+          <a:prstGeom prst="rect">
+            <a:avLst/>
+          </a:prstGeom>
+        </p:spPr>
+      </p:pic>
+      <p:pic>
+        <p:nvPicPr>
+          <p:cNvPr id="10" name="圖片 9">
+            <a:extLst>
+              <a:ext uri="{FF2B5EF4-FFF2-40B4-BE49-F238E27FC236}">
+                <a16:creationId xmlns:a16="http://schemas.microsoft.com/office/drawing/2014/main" id="{C977124F-3B09-7047-C5F4-F2F7552661E5}"/>
+              </a:ext>
+            </a:extLst>
+          </p:cNvPr>
+          <p:cNvPicPr>
+            <a:picLocks noChangeAspect="1"/>
+          </p:cNvPicPr>
+          <p:nvPr/>
+        </p:nvPicPr>
+        <p:blipFill>
+          <a:blip r:embed="rId4"/>
+          <a:stretch>
+            <a:fillRect/>
+          </a:stretch>
+        </p:blipFill>
+        <p:spPr>
+          <a:xfrm>
+            <a:off x="7164156" y="1974006"/>
+            <a:ext cx="4724656" cy="1491651"/>
+          </a:xfrm>
+          <a:prstGeom prst="rect">
+            <a:avLst/>
+          </a:prstGeom>
+        </p:spPr>
+      </p:pic>
+      <p:pic>
+        <p:nvPicPr>
+          <p:cNvPr id="12" name="圖片 11">
+            <a:extLst>
+              <a:ext uri="{FF2B5EF4-FFF2-40B4-BE49-F238E27FC236}">
+                <a16:creationId xmlns:a16="http://schemas.microsoft.com/office/drawing/2014/main" id="{42183FA9-9119-116E-BF8F-09D84493B6A1}"/>
+              </a:ext>
+            </a:extLst>
+          </p:cNvPr>
+          <p:cNvPicPr>
+            <a:picLocks noChangeAspect="1"/>
+          </p:cNvPicPr>
+          <p:nvPr/>
+        </p:nvPicPr>
+        <p:blipFill>
+          <a:blip r:embed="rId5"/>
+          <a:stretch>
+            <a:fillRect/>
+          </a:stretch>
+        </p:blipFill>
+        <p:spPr>
+          <a:xfrm>
+            <a:off x="7164156" y="4038781"/>
+            <a:ext cx="4724656" cy="1341135"/>
+          </a:xfrm>
+          <a:prstGeom prst="rect">
+            <a:avLst/>
+          </a:prstGeom>
+        </p:spPr>
+      </p:pic>
+      <p:sp>
+        <p:nvSpPr>
+          <p:cNvPr id="13" name="矩形 12">
+            <a:extLst>
+              <a:ext uri="{FF2B5EF4-FFF2-40B4-BE49-F238E27FC236}">
+                <a16:creationId xmlns:a16="http://schemas.microsoft.com/office/drawing/2014/main" id="{D14316C1-3DEC-A5AC-311B-F9188250E56A}"/>
+              </a:ext>
+            </a:extLst>
+          </p:cNvPr>
+          <p:cNvSpPr/>
+          <p:nvPr/>
+        </p:nvSpPr>
+        <p:spPr>
+          <a:xfrm>
+            <a:off x="1325880" y="1882140"/>
+            <a:ext cx="2141220" cy="427279"/>
+          </a:xfrm>
+          <a:prstGeom prst="rect">
+            <a:avLst/>
+          </a:prstGeom>
+          <a:noFill/>
+          <a:ln>
+            <a:solidFill>
+              <a:srgbClr val="FF0000"/>
+            </a:solidFill>
+          </a:ln>
+        </p:spPr>
+        <p:style>
+          <a:lnRef idx="2">
+            <a:schemeClr val="accent1">
+              <a:shade val="15000"/>
+            </a:schemeClr>
+          </a:lnRef>
+          <a:fillRef idx="1">
+            <a:schemeClr val="accent1"/>
+          </a:fillRef>
+          <a:effectRef idx="0">
+            <a:schemeClr val="accent1"/>
+          </a:effectRef>
+          <a:fontRef idx="minor">
+            <a:schemeClr val="lt1"/>
+          </a:fontRef>
+        </p:style>
+        <p:txBody>
+          <a:bodyPr rtlCol="0" anchor="ctr"/>
+          <a:lstStyle/>
+          <a:p>
+            <a:pPr algn="ctr"/>
+            <a:endParaRPr lang="zh-TW" altLang="en-US"/>
+          </a:p>
+        </p:txBody>
+      </p:sp>
+      <p:sp>
+        <p:nvSpPr>
+          <p:cNvPr id="14" name="矩形 13">
+            <a:extLst>
+              <a:ext uri="{FF2B5EF4-FFF2-40B4-BE49-F238E27FC236}">
+                <a16:creationId xmlns:a16="http://schemas.microsoft.com/office/drawing/2014/main" id="{FA2658DE-C46D-F3DE-A428-946CB4287F56}"/>
+              </a:ext>
+            </a:extLst>
+          </p:cNvPr>
+          <p:cNvSpPr/>
+          <p:nvPr/>
+        </p:nvSpPr>
+        <p:spPr>
+          <a:xfrm>
+            <a:off x="4145507" y="2887980"/>
+            <a:ext cx="2354353" cy="434340"/>
+          </a:xfrm>
+          <a:prstGeom prst="rect">
+            <a:avLst/>
+          </a:prstGeom>
+          <a:noFill/>
+          <a:ln>
+            <a:solidFill>
+              <a:srgbClr val="FF0000"/>
+            </a:solidFill>
+          </a:ln>
+        </p:spPr>
+        <p:style>
+          <a:lnRef idx="2">
+            <a:schemeClr val="accent1">
+              <a:shade val="15000"/>
+            </a:schemeClr>
+          </a:lnRef>
+          <a:fillRef idx="1">
+            <a:schemeClr val="accent1"/>
+          </a:fillRef>
+          <a:effectRef idx="0">
+            <a:schemeClr val="accent1"/>
+          </a:effectRef>
+          <a:fontRef idx="minor">
+            <a:schemeClr val="lt1"/>
+          </a:fontRef>
+        </p:style>
+        <p:txBody>
+          <a:bodyPr rtlCol="0" anchor="ctr"/>
+          <a:lstStyle/>
+          <a:p>
+            <a:pPr algn="ctr"/>
+            <a:endParaRPr lang="zh-TW" altLang="en-US"/>
+          </a:p>
+        </p:txBody>
+      </p:sp>
+      <p:sp>
+        <p:nvSpPr>
+          <p:cNvPr id="15" name="矩形 14">
+            <a:extLst>
+              <a:ext uri="{FF2B5EF4-FFF2-40B4-BE49-F238E27FC236}">
+                <a16:creationId xmlns:a16="http://schemas.microsoft.com/office/drawing/2014/main" id="{FB12EBB0-4575-E627-8F09-C5198E84F730}"/>
+              </a:ext>
+            </a:extLst>
+          </p:cNvPr>
+          <p:cNvSpPr/>
+          <p:nvPr/>
+        </p:nvSpPr>
+        <p:spPr>
+          <a:xfrm>
+            <a:off x="7261860" y="3093720"/>
+            <a:ext cx="3840480" cy="335280"/>
+          </a:xfrm>
+          <a:prstGeom prst="rect">
+            <a:avLst/>
+          </a:prstGeom>
+          <a:noFill/>
+          <a:ln>
+            <a:solidFill>
+              <a:srgbClr val="FF0000"/>
+            </a:solidFill>
+          </a:ln>
+        </p:spPr>
+        <p:style>
+          <a:lnRef idx="2">
+            <a:schemeClr val="accent1">
+              <a:shade val="15000"/>
+            </a:schemeClr>
+          </a:lnRef>
+          <a:fillRef idx="1">
+            <a:schemeClr val="accent1"/>
+          </a:fillRef>
+          <a:effectRef idx="0">
+            <a:schemeClr val="accent1"/>
+          </a:effectRef>
+          <a:fontRef idx="minor">
+            <a:schemeClr val="lt1"/>
+          </a:fontRef>
+        </p:style>
+        <p:txBody>
+          <a:bodyPr rtlCol="0" anchor="ctr"/>
+          <a:lstStyle/>
+          <a:p>
+            <a:pPr algn="ctr"/>
+            <a:endParaRPr lang="zh-TW" altLang="en-US"/>
+          </a:p>
+        </p:txBody>
+      </p:sp>
+      <p:sp>
+        <p:nvSpPr>
+          <p:cNvPr id="16" name="矩形 15">
+            <a:extLst>
+              <a:ext uri="{FF2B5EF4-FFF2-40B4-BE49-F238E27FC236}">
+                <a16:creationId xmlns:a16="http://schemas.microsoft.com/office/drawing/2014/main" id="{B27A0A90-C4B0-6714-9958-BEE096253A92}"/>
+              </a:ext>
+            </a:extLst>
+          </p:cNvPr>
+          <p:cNvSpPr/>
+          <p:nvPr/>
+        </p:nvSpPr>
+        <p:spPr>
+          <a:xfrm>
+            <a:off x="830580" y="3147060"/>
+            <a:ext cx="1150620" cy="556260"/>
+          </a:xfrm>
+          <a:prstGeom prst="rect">
+            <a:avLst/>
+          </a:prstGeom>
+          <a:noFill/>
+          <a:ln>
+            <a:solidFill>
+              <a:srgbClr val="FF0000"/>
+            </a:solidFill>
+          </a:ln>
+        </p:spPr>
+        <p:style>
+          <a:lnRef idx="2">
+            <a:schemeClr val="accent1">
+              <a:shade val="15000"/>
+            </a:schemeClr>
+          </a:lnRef>
+          <a:fillRef idx="1">
+            <a:schemeClr val="accent1"/>
+          </a:fillRef>
+          <a:effectRef idx="0">
+            <a:schemeClr val="accent1"/>
+          </a:effectRef>
+          <a:fontRef idx="minor">
+            <a:schemeClr val="lt1"/>
+          </a:fontRef>
+        </p:style>
+        <p:txBody>
+          <a:bodyPr rtlCol="0" anchor="ctr"/>
+          <a:lstStyle/>
+          <a:p>
+            <a:pPr algn="ctr"/>
+            <a:endParaRPr lang="zh-TW" altLang="en-US"/>
+          </a:p>
+        </p:txBody>
+      </p:sp>
+      <p:sp>
+        <p:nvSpPr>
+          <p:cNvPr id="17" name="矩形 16">
+            <a:extLst>
+              <a:ext uri="{FF2B5EF4-FFF2-40B4-BE49-F238E27FC236}">
+                <a16:creationId xmlns:a16="http://schemas.microsoft.com/office/drawing/2014/main" id="{65BFCF7F-7689-1F38-497D-F4592EE6C57D}"/>
+              </a:ext>
+            </a:extLst>
+          </p:cNvPr>
+          <p:cNvSpPr/>
+          <p:nvPr/>
+        </p:nvSpPr>
+        <p:spPr>
+          <a:xfrm>
+            <a:off x="4206240" y="3558540"/>
+            <a:ext cx="1569720" cy="434340"/>
+          </a:xfrm>
+          <a:prstGeom prst="rect">
+            <a:avLst/>
+          </a:prstGeom>
+          <a:noFill/>
+          <a:ln>
+            <a:solidFill>
+              <a:srgbClr val="FF0000"/>
+            </a:solidFill>
+          </a:ln>
+        </p:spPr>
+        <p:style>
+          <a:lnRef idx="2">
+            <a:schemeClr val="accent1">
+              <a:shade val="15000"/>
+            </a:schemeClr>
+          </a:lnRef>
+          <a:fillRef idx="1">
+            <a:schemeClr val="accent1"/>
+          </a:fillRef>
+          <a:effectRef idx="0">
+            <a:schemeClr val="accent1"/>
+          </a:effectRef>
+          <a:fontRef idx="minor">
+            <a:schemeClr val="lt1"/>
+          </a:fontRef>
+        </p:style>
+        <p:txBody>
+          <a:bodyPr rtlCol="0" anchor="ctr"/>
+          <a:lstStyle/>
+          <a:p>
+            <a:pPr algn="ctr"/>
+            <a:endParaRPr lang="zh-TW" altLang="en-US"/>
+          </a:p>
+        </p:txBody>
+      </p:sp>
+      <p:sp>
+        <p:nvSpPr>
+          <p:cNvPr id="18" name="矩形: 圓角 17">
+            <a:extLst>
+              <a:ext uri="{FF2B5EF4-FFF2-40B4-BE49-F238E27FC236}">
+                <a16:creationId xmlns:a16="http://schemas.microsoft.com/office/drawing/2014/main" id="{1E7FF128-453D-36EA-1DA6-00CDB67E6821}"/>
+              </a:ext>
+            </a:extLst>
+          </p:cNvPr>
+          <p:cNvSpPr/>
+          <p:nvPr/>
+        </p:nvSpPr>
+        <p:spPr>
+          <a:xfrm>
+            <a:off x="830580" y="3878580"/>
+            <a:ext cx="1623060" cy="784860"/>
+          </a:xfrm>
+          <a:prstGeom prst="roundRect">
+            <a:avLst/>
+          </a:prstGeom>
+          <a:noFill/>
+          <a:ln>
+            <a:solidFill>
+              <a:srgbClr val="FF0000"/>
+            </a:solidFill>
+          </a:ln>
+        </p:spPr>
+        <p:style>
+          <a:lnRef idx="2">
+            <a:schemeClr val="accent1">
+              <a:shade val="15000"/>
+            </a:schemeClr>
+          </a:lnRef>
+          <a:fillRef idx="1">
+            <a:schemeClr val="accent1"/>
+          </a:fillRef>
+          <a:effectRef idx="0">
+            <a:schemeClr val="accent1"/>
+          </a:effectRef>
+          <a:fontRef idx="minor">
+            <a:schemeClr val="lt1"/>
+          </a:fontRef>
+        </p:style>
+        <p:txBody>
+          <a:bodyPr rtlCol="0" anchor="ctr"/>
+          <a:lstStyle/>
+          <a:p>
+            <a:pPr algn="ctr"/>
+            <a:endParaRPr lang="zh-TW" altLang="en-US"/>
+          </a:p>
+        </p:txBody>
+      </p:sp>
+      <p:sp>
+        <p:nvSpPr>
+          <p:cNvPr id="19" name="矩形: 圓角 18">
+            <a:extLst>
+              <a:ext uri="{FF2B5EF4-FFF2-40B4-BE49-F238E27FC236}">
+                <a16:creationId xmlns:a16="http://schemas.microsoft.com/office/drawing/2014/main" id="{2798837A-3E98-568F-DA41-B94ABFD4B34A}"/>
+              </a:ext>
+            </a:extLst>
+          </p:cNvPr>
+          <p:cNvSpPr/>
+          <p:nvPr/>
+        </p:nvSpPr>
+        <p:spPr>
+          <a:xfrm>
+            <a:off x="4206240" y="4282440"/>
+            <a:ext cx="2606040" cy="243840"/>
+          </a:xfrm>
+          <a:prstGeom prst="roundRect">
+            <a:avLst/>
+          </a:prstGeom>
+          <a:noFill/>
+          <a:ln>
+            <a:solidFill>
+              <a:srgbClr val="FF0000"/>
+            </a:solidFill>
+          </a:ln>
+        </p:spPr>
+        <p:style>
+          <a:lnRef idx="2">
+            <a:schemeClr val="accent1">
+              <a:shade val="15000"/>
+            </a:schemeClr>
+          </a:lnRef>
+          <a:fillRef idx="1">
+            <a:schemeClr val="accent1"/>
+          </a:fillRef>
+          <a:effectRef idx="0">
+            <a:schemeClr val="accent1"/>
+          </a:effectRef>
+          <a:fontRef idx="minor">
+            <a:schemeClr val="lt1"/>
+          </a:fontRef>
+        </p:style>
+        <p:txBody>
+          <a:bodyPr rtlCol="0" anchor="ctr"/>
+          <a:lstStyle/>
+          <a:p>
+            <a:pPr algn="ctr"/>
+            <a:endParaRPr lang="zh-TW" altLang="en-US"/>
+          </a:p>
+        </p:txBody>
+      </p:sp>
+      <p:sp>
+        <p:nvSpPr>
+          <p:cNvPr id="20" name="矩形: 圓角 19">
+            <a:extLst>
+              <a:ext uri="{FF2B5EF4-FFF2-40B4-BE49-F238E27FC236}">
+                <a16:creationId xmlns:a16="http://schemas.microsoft.com/office/drawing/2014/main" id="{759E8857-C60A-EC02-6EEA-C24ABF0DCDA5}"/>
+              </a:ext>
+            </a:extLst>
+          </p:cNvPr>
+          <p:cNvSpPr/>
+          <p:nvPr/>
+        </p:nvSpPr>
+        <p:spPr>
+          <a:xfrm>
+            <a:off x="7164156" y="4373880"/>
+            <a:ext cx="3313344" cy="350520"/>
+          </a:xfrm>
+          <a:prstGeom prst="roundRect">
+            <a:avLst/>
+          </a:prstGeom>
+          <a:noFill/>
+          <a:ln>
+            <a:solidFill>
+              <a:srgbClr val="FF0000"/>
+            </a:solidFill>
+          </a:ln>
+        </p:spPr>
+        <p:style>
+          <a:lnRef idx="2">
+            <a:schemeClr val="accent1">
+              <a:shade val="15000"/>
+            </a:schemeClr>
+          </a:lnRef>
+          <a:fillRef idx="1">
+            <a:schemeClr val="accent1"/>
+          </a:fillRef>
+          <a:effectRef idx="0">
+            <a:schemeClr val="accent1"/>
+          </a:effectRef>
+          <a:fontRef idx="minor">
+            <a:schemeClr val="lt1"/>
+          </a:fontRef>
+        </p:style>
+        <p:txBody>
+          <a:bodyPr rtlCol="0" anchor="ctr"/>
+          <a:lstStyle/>
+          <a:p>
+            <a:pPr algn="ctr"/>
+            <a:endParaRPr lang="zh-TW" altLang="en-US"/>
+          </a:p>
+        </p:txBody>
+      </p:sp>
+      <p:sp>
+        <p:nvSpPr>
+          <p:cNvPr id="21" name="矩形: 圓角 20">
+            <a:extLst>
+              <a:ext uri="{FF2B5EF4-FFF2-40B4-BE49-F238E27FC236}">
+                <a16:creationId xmlns:a16="http://schemas.microsoft.com/office/drawing/2014/main" id="{892C2E78-756F-3332-0E58-5E12A0D1AAB0}"/>
+              </a:ext>
+            </a:extLst>
+          </p:cNvPr>
+          <p:cNvSpPr/>
+          <p:nvPr/>
+        </p:nvSpPr>
+        <p:spPr>
+          <a:xfrm>
+            <a:off x="4206240" y="4526280"/>
+            <a:ext cx="579120" cy="198120"/>
+          </a:xfrm>
+          <a:prstGeom prst="roundRect">
+            <a:avLst/>
+          </a:prstGeom>
+          <a:noFill/>
+          <a:ln>
+            <a:solidFill>
+              <a:srgbClr val="FF0000"/>
+            </a:solidFill>
+          </a:ln>
+        </p:spPr>
+        <p:style>
+          <a:lnRef idx="2">
+            <a:schemeClr val="accent1">
+              <a:shade val="15000"/>
+            </a:schemeClr>
+          </a:lnRef>
+          <a:fillRef idx="1">
+            <a:schemeClr val="accent1"/>
+          </a:fillRef>
+          <a:effectRef idx="0">
+            <a:schemeClr val="accent1"/>
+          </a:effectRef>
+          <a:fontRef idx="minor">
+            <a:schemeClr val="lt1"/>
+          </a:fontRef>
+        </p:style>
+        <p:txBody>
+          <a:bodyPr rtlCol="0" anchor="ctr"/>
+          <a:lstStyle/>
+          <a:p>
+            <a:pPr algn="ctr"/>
+            <a:endParaRPr lang="zh-TW" altLang="en-US"/>
+          </a:p>
+        </p:txBody>
+      </p:sp>
+    </p:spTree>
+    <p:extLst>
+      <p:ext uri="{BB962C8B-B14F-4D97-AF65-F5344CB8AC3E}">
+        <p14:creationId xmlns:p14="http://schemas.microsoft.com/office/powerpoint/2010/main" val="2669239561"/>
+      </p:ext>
+    </p:extLst>
+  </p:cSld>
+  <p:clrMapOvr>
+    <a:masterClrMapping/>
+  </p:clrMapOvr>
+</p:sld>
+</file>
+
+<file path=ppt/slides/slide7.xml><?xml version="1.0" encoding="utf-8"?>
+<p:sld xmlns:a="http://schemas.openxmlformats.org/drawingml/2006/main" xmlns:r="http://schemas.openxmlformats.org/officeDocument/2006/relationships" xmlns:p="http://schemas.openxmlformats.org/presentationml/2006/main">
+  <p:cSld>
+    <p:spTree>
+      <p:nvGrpSpPr>
+        <p:cNvPr id="1" name="">
+          <a:extLst>
+            <a:ext uri="{FF2B5EF4-FFF2-40B4-BE49-F238E27FC236}">
+              <a16:creationId xmlns:a16="http://schemas.microsoft.com/office/drawing/2014/main" id="{03CD2585-0E6B-C802-4AFE-F3D335CB51F3}"/>
+            </a:ext>
+          </a:extLst>
+        </p:cNvPr>
+        <p:cNvGrpSpPr/>
+        <p:nvPr/>
+      </p:nvGrpSpPr>
+      <p:grpSpPr>
+        <a:xfrm>
+          <a:off x="0" y="0"/>
+          <a:ext cx="0" cy="0"/>
+          <a:chOff x="0" y="0"/>
+          <a:chExt cx="0" cy="0"/>
+        </a:xfrm>
+      </p:grpSpPr>
+      <p:sp>
+        <p:nvSpPr>
+          <p:cNvPr id="5" name="文字方塊 4">
+            <a:extLst>
+              <a:ext uri="{FF2B5EF4-FFF2-40B4-BE49-F238E27FC236}">
+                <a16:creationId xmlns:a16="http://schemas.microsoft.com/office/drawing/2014/main" id="{34512578-C347-4D35-A41D-A6705C5F1C52}"/>
+              </a:ext>
+            </a:extLst>
+          </p:cNvPr>
+          <p:cNvSpPr txBox="1"/>
+          <p:nvPr/>
+        </p:nvSpPr>
+        <p:spPr>
+          <a:xfrm>
+            <a:off x="363359" y="4606925"/>
+            <a:ext cx="3962400" cy="1200329"/>
+          </a:xfrm>
+          <a:prstGeom prst="rect">
+            <a:avLst/>
+          </a:prstGeom>
+          <a:noFill/>
+        </p:spPr>
+        <p:txBody>
+          <a:bodyPr wrap="square" rtlCol="0">
+            <a:spAutoFit/>
+          </a:bodyPr>
+          <a:lstStyle/>
+          <a:p>
+            <a:r>
+              <a:rPr lang="en-US" altLang="zh-TW" dirty="0"/>
+              <a:t>input</a:t>
+            </a:r>
+            <a:r>
+              <a:rPr lang="zh-TW" altLang="en-US" dirty="0"/>
+              <a:t>輸入</a:t>
+            </a:r>
+            <a:endParaRPr lang="en-US" altLang="zh-TW" dirty="0"/>
+          </a:p>
+          <a:p>
+            <a:r>
+              <a:rPr lang="en-US" altLang="zh-TW" dirty="0"/>
+              <a:t>//</a:t>
+            </a:r>
+            <a:r>
+              <a:rPr lang="zh-TW" altLang="en-US" dirty="0"/>
+              <a:t>整除</a:t>
+            </a:r>
+            <a:endParaRPr lang="en-US" altLang="zh-TW" dirty="0"/>
+          </a:p>
+          <a:p>
+            <a:r>
+              <a:rPr lang="en-US" altLang="zh-TW" dirty="0"/>
+              <a:t>%</a:t>
+            </a:r>
+            <a:r>
+              <a:rPr lang="zh-TW" altLang="en-US" dirty="0"/>
+              <a:t>取餘數</a:t>
+            </a:r>
+            <a:endParaRPr lang="en-US" altLang="zh-TW" dirty="0"/>
+          </a:p>
+          <a:p>
+            <a:r>
+              <a:rPr lang="en-US" altLang="zh-TW" dirty="0"/>
+              <a:t>.format()</a:t>
+            </a:r>
+            <a:r>
+              <a:rPr lang="zh-TW" altLang="en-US" dirty="0"/>
+              <a:t>把字串輸入到</a:t>
+            </a:r>
+            <a:r>
+              <a:rPr lang="en-US" altLang="zh-TW" dirty="0"/>
+              <a:t>{}</a:t>
+            </a:r>
+            <a:r>
+              <a:rPr lang="zh-TW" altLang="en-US" dirty="0"/>
+              <a:t>裡</a:t>
+            </a:r>
+          </a:p>
+        </p:txBody>
+      </p:sp>
+      <p:sp>
+        <p:nvSpPr>
+          <p:cNvPr id="2" name="文字方塊 1">
+            <a:extLst>
+              <a:ext uri="{FF2B5EF4-FFF2-40B4-BE49-F238E27FC236}">
+                <a16:creationId xmlns:a16="http://schemas.microsoft.com/office/drawing/2014/main" id="{88DEB98E-183C-7BBB-32FC-ED7D2323E8EE}"/>
+              </a:ext>
+            </a:extLst>
+          </p:cNvPr>
+          <p:cNvSpPr txBox="1"/>
+          <p:nvPr/>
+        </p:nvSpPr>
+        <p:spPr>
+          <a:xfrm>
+            <a:off x="10477500" y="485463"/>
+            <a:ext cx="647700" cy="369332"/>
+          </a:xfrm>
+          <a:prstGeom prst="rect">
+            <a:avLst/>
+          </a:prstGeom>
+          <a:noFill/>
+        </p:spPr>
+        <p:txBody>
+          <a:bodyPr wrap="square" rtlCol="0">
+            <a:spAutoFit/>
+          </a:bodyPr>
+          <a:lstStyle/>
+          <a:p>
+            <a:r>
+              <a:rPr lang="en-US" altLang="zh-TW" dirty="0"/>
+              <a:t>p55</a:t>
+            </a:r>
+            <a:endParaRPr lang="zh-TW" altLang="en-US" dirty="0"/>
+          </a:p>
+        </p:txBody>
+      </p:sp>
+      <p:pic>
+        <p:nvPicPr>
+          <p:cNvPr id="4" name="圖片 3">
+            <a:extLst>
+              <a:ext uri="{FF2B5EF4-FFF2-40B4-BE49-F238E27FC236}">
+                <a16:creationId xmlns:a16="http://schemas.microsoft.com/office/drawing/2014/main" id="{D6120DD9-3AEE-0546-E0F1-F14607B31FA8}"/>
+              </a:ext>
+            </a:extLst>
+          </p:cNvPr>
+          <p:cNvPicPr>
+            <a:picLocks noChangeAspect="1"/>
+          </p:cNvPicPr>
+          <p:nvPr/>
+        </p:nvPicPr>
+        <p:blipFill>
+          <a:blip r:embed="rId2"/>
+          <a:stretch>
+            <a:fillRect/>
+          </a:stretch>
+        </p:blipFill>
+        <p:spPr>
+          <a:xfrm>
+            <a:off x="363359" y="854795"/>
+            <a:ext cx="4099568" cy="3110306"/>
+          </a:xfrm>
+          <a:prstGeom prst="rect">
+            <a:avLst/>
+          </a:prstGeom>
+        </p:spPr>
+      </p:pic>
+      <p:pic>
+        <p:nvPicPr>
+          <p:cNvPr id="7" name="圖片 6">
+            <a:extLst>
+              <a:ext uri="{FF2B5EF4-FFF2-40B4-BE49-F238E27FC236}">
+                <a16:creationId xmlns:a16="http://schemas.microsoft.com/office/drawing/2014/main" id="{5ECAE17E-5019-FDD1-E793-C57A331D5182}"/>
+              </a:ext>
+            </a:extLst>
+          </p:cNvPr>
+          <p:cNvPicPr>
+            <a:picLocks noChangeAspect="1"/>
+          </p:cNvPicPr>
+          <p:nvPr/>
+        </p:nvPicPr>
+        <p:blipFill>
+          <a:blip r:embed="rId3"/>
+          <a:stretch>
+            <a:fillRect/>
+          </a:stretch>
+        </p:blipFill>
+        <p:spPr>
+          <a:xfrm>
+            <a:off x="4497998" y="1897888"/>
+            <a:ext cx="2972215" cy="2067213"/>
+          </a:xfrm>
+          <a:prstGeom prst="rect">
+            <a:avLst/>
+          </a:prstGeom>
+        </p:spPr>
+      </p:pic>
+      <p:sp>
+        <p:nvSpPr>
+          <p:cNvPr id="8" name="文字方塊 7">
+            <a:extLst>
+              <a:ext uri="{FF2B5EF4-FFF2-40B4-BE49-F238E27FC236}">
+                <a16:creationId xmlns:a16="http://schemas.microsoft.com/office/drawing/2014/main" id="{2000A2F8-3F55-C075-1275-DBE534713BEB}"/>
+              </a:ext>
+            </a:extLst>
+          </p:cNvPr>
+          <p:cNvSpPr txBox="1"/>
+          <p:nvPr/>
+        </p:nvSpPr>
+        <p:spPr>
+          <a:xfrm>
+            <a:off x="4462927" y="1420419"/>
+            <a:ext cx="1576629" cy="369332"/>
+          </a:xfrm>
+          <a:prstGeom prst="rect">
+            <a:avLst/>
+          </a:prstGeom>
+          <a:noFill/>
+        </p:spPr>
+        <p:txBody>
+          <a:bodyPr wrap="square" rtlCol="0">
+            <a:spAutoFit/>
+          </a:bodyPr>
+          <a:lstStyle/>
+          <a:p>
+            <a:r>
+              <a:rPr lang="zh-TW" altLang="en-US" dirty="0"/>
+              <a:t>輸出</a:t>
+            </a:r>
+            <a:endParaRPr lang="en-US" altLang="zh-TW" dirty="0"/>
+          </a:p>
+        </p:txBody>
+      </p:sp>
+      <p:pic>
+        <p:nvPicPr>
+          <p:cNvPr id="10" name="圖片 9">
+            <a:extLst>
+              <a:ext uri="{FF2B5EF4-FFF2-40B4-BE49-F238E27FC236}">
+                <a16:creationId xmlns:a16="http://schemas.microsoft.com/office/drawing/2014/main" id="{46E09797-EEE3-8DCC-2505-C6C324139866}"/>
+              </a:ext>
+            </a:extLst>
+          </p:cNvPr>
+          <p:cNvPicPr>
+            <a:picLocks noChangeAspect="1"/>
+          </p:cNvPicPr>
+          <p:nvPr/>
+        </p:nvPicPr>
+        <p:blipFill>
+          <a:blip r:embed="rId4"/>
+          <a:stretch>
+            <a:fillRect/>
+          </a:stretch>
+        </p:blipFill>
+        <p:spPr>
+          <a:xfrm>
+            <a:off x="7614775" y="1420419"/>
+            <a:ext cx="4425493" cy="1614217"/>
+          </a:xfrm>
+          <a:prstGeom prst="rect">
+            <a:avLst/>
+          </a:prstGeom>
+        </p:spPr>
+      </p:pic>
+      <p:pic>
+        <p:nvPicPr>
+          <p:cNvPr id="12" name="圖片 11">
+            <a:extLst>
+              <a:ext uri="{FF2B5EF4-FFF2-40B4-BE49-F238E27FC236}">
+                <a16:creationId xmlns:a16="http://schemas.microsoft.com/office/drawing/2014/main" id="{A20D79D4-59D7-A633-DF7F-F1696CDEE11E}"/>
+              </a:ext>
+            </a:extLst>
+          </p:cNvPr>
+          <p:cNvPicPr>
+            <a:picLocks noChangeAspect="1"/>
+          </p:cNvPicPr>
+          <p:nvPr/>
+        </p:nvPicPr>
+        <p:blipFill>
+          <a:blip r:embed="rId5"/>
+          <a:stretch>
+            <a:fillRect/>
+          </a:stretch>
+        </p:blipFill>
+        <p:spPr>
+          <a:xfrm>
+            <a:off x="7567151" y="3220480"/>
+            <a:ext cx="4473118" cy="1232478"/>
+          </a:xfrm>
+          <a:prstGeom prst="rect">
+            <a:avLst/>
+          </a:prstGeom>
+        </p:spPr>
+      </p:pic>
+      <p:sp>
+        <p:nvSpPr>
+          <p:cNvPr id="13" name="矩形 12">
+            <a:extLst>
+              <a:ext uri="{FF2B5EF4-FFF2-40B4-BE49-F238E27FC236}">
+                <a16:creationId xmlns:a16="http://schemas.microsoft.com/office/drawing/2014/main" id="{98274BC8-1454-7A1C-281D-B385FEA7A3F6}"/>
+              </a:ext>
+            </a:extLst>
+          </p:cNvPr>
+          <p:cNvSpPr/>
+          <p:nvPr/>
+        </p:nvSpPr>
+        <p:spPr>
+          <a:xfrm>
+            <a:off x="8515350" y="2228850"/>
+            <a:ext cx="530082" cy="161925"/>
+          </a:xfrm>
+          <a:prstGeom prst="rect">
+            <a:avLst/>
+          </a:prstGeom>
+          <a:noFill/>
+          <a:ln>
+            <a:solidFill>
+              <a:srgbClr val="FF0000"/>
+            </a:solidFill>
+          </a:ln>
+        </p:spPr>
+        <p:style>
+          <a:lnRef idx="2">
+            <a:schemeClr val="accent1">
+              <a:shade val="15000"/>
+            </a:schemeClr>
+          </a:lnRef>
+          <a:fillRef idx="1">
+            <a:schemeClr val="accent1"/>
+          </a:fillRef>
+          <a:effectRef idx="0">
+            <a:schemeClr val="accent1"/>
+          </a:effectRef>
+          <a:fontRef idx="minor">
+            <a:schemeClr val="lt1"/>
+          </a:fontRef>
+        </p:style>
+        <p:txBody>
+          <a:bodyPr rtlCol="0" anchor="ctr"/>
+          <a:lstStyle/>
+          <a:p>
+            <a:pPr algn="ctr"/>
+            <a:endParaRPr lang="zh-TW" altLang="en-US"/>
+          </a:p>
+        </p:txBody>
+      </p:sp>
+    </p:spTree>
+    <p:extLst>
+      <p:ext uri="{BB962C8B-B14F-4D97-AF65-F5344CB8AC3E}">
+        <p14:creationId xmlns:p14="http://schemas.microsoft.com/office/powerpoint/2010/main" val="2344298319"/>
+      </p:ext>
+    </p:extLst>
+  </p:cSld>
+  <p:clrMapOvr>
+    <a:masterClrMapping/>
+  </p:clrMapOvr>
+</p:sld>
+</file>
+
+<file path=ppt/slides/slide8.xml><?xml version="1.0" encoding="utf-8"?>
+<p:sld xmlns:a="http://schemas.openxmlformats.org/drawingml/2006/main" xmlns:r="http://schemas.openxmlformats.org/officeDocument/2006/relationships" xmlns:p="http://schemas.openxmlformats.org/presentationml/2006/main">
+  <p:cSld>
+    <p:spTree>
+      <p:nvGrpSpPr>
+        <p:cNvPr id="1" name="">
+          <a:extLst>
+            <a:ext uri="{FF2B5EF4-FFF2-40B4-BE49-F238E27FC236}">
+              <a16:creationId xmlns:a16="http://schemas.microsoft.com/office/drawing/2014/main" id="{FE5D9F28-07FA-2EA4-492A-0F714C0F4B97}"/>
+            </a:ext>
+          </a:extLst>
+        </p:cNvPr>
+        <p:cNvGrpSpPr/>
+        <p:nvPr/>
+      </p:nvGrpSpPr>
+      <p:grpSpPr>
+        <a:xfrm>
+          <a:off x="0" y="0"/>
+          <a:ext cx="0" cy="0"/>
+          <a:chOff x="0" y="0"/>
+          <a:chExt cx="0" cy="0"/>
+        </a:xfrm>
+      </p:grpSpPr>
+      <p:sp>
+        <p:nvSpPr>
+          <p:cNvPr id="5" name="文字方塊 4">
+            <a:extLst>
+              <a:ext uri="{FF2B5EF4-FFF2-40B4-BE49-F238E27FC236}">
+                <a16:creationId xmlns:a16="http://schemas.microsoft.com/office/drawing/2014/main" id="{59AE37A9-4471-9BB9-0918-BBC1A463EEA7}"/>
+              </a:ext>
+            </a:extLst>
+          </p:cNvPr>
+          <p:cNvSpPr txBox="1"/>
+          <p:nvPr/>
+        </p:nvSpPr>
+        <p:spPr>
+          <a:xfrm>
+            <a:off x="363359" y="4606925"/>
+            <a:ext cx="3962400" cy="1200329"/>
+          </a:xfrm>
+          <a:prstGeom prst="rect">
+            <a:avLst/>
+          </a:prstGeom>
+          <a:noFill/>
+        </p:spPr>
+        <p:txBody>
+          <a:bodyPr wrap="square" rtlCol="0">
+            <a:spAutoFit/>
+          </a:bodyPr>
+          <a:lstStyle/>
+          <a:p>
+            <a:r>
+              <a:rPr lang="en-US" altLang="zh-TW" dirty="0"/>
+              <a:t>input</a:t>
+            </a:r>
+            <a:r>
+              <a:rPr lang="zh-TW" altLang="en-US" dirty="0"/>
+              <a:t>輸入</a:t>
+            </a:r>
+            <a:endParaRPr lang="en-US" altLang="zh-TW" dirty="0"/>
+          </a:p>
+          <a:p>
+            <a:r>
+              <a:rPr lang="en-US" altLang="zh-TW" dirty="0"/>
+              <a:t>//</a:t>
+            </a:r>
+            <a:r>
+              <a:rPr lang="zh-TW" altLang="en-US" dirty="0"/>
+              <a:t>整除</a:t>
+            </a:r>
+            <a:endParaRPr lang="en-US" altLang="zh-TW" dirty="0"/>
+          </a:p>
+          <a:p>
+            <a:r>
+              <a:rPr lang="en-US" altLang="zh-TW" dirty="0"/>
+              <a:t>%</a:t>
+            </a:r>
+            <a:r>
+              <a:rPr lang="zh-TW" altLang="en-US" dirty="0"/>
+              <a:t>取餘數</a:t>
+            </a:r>
+            <a:endParaRPr lang="en-US" altLang="zh-TW" dirty="0"/>
+          </a:p>
+          <a:p>
+            <a:r>
+              <a:rPr lang="en-US" altLang="zh-TW" dirty="0"/>
+              <a:t>.format()</a:t>
+            </a:r>
+            <a:r>
+              <a:rPr lang="zh-TW" altLang="en-US" dirty="0"/>
+              <a:t>把字串輸入到</a:t>
+            </a:r>
+            <a:r>
+              <a:rPr lang="en-US" altLang="zh-TW" dirty="0"/>
+              <a:t>{}</a:t>
+            </a:r>
+            <a:r>
+              <a:rPr lang="zh-TW" altLang="en-US" dirty="0"/>
+              <a:t>裡</a:t>
+            </a:r>
+          </a:p>
+        </p:txBody>
+      </p:sp>
+      <p:sp>
+        <p:nvSpPr>
+          <p:cNvPr id="2" name="文字方塊 1">
+            <a:extLst>
+              <a:ext uri="{FF2B5EF4-FFF2-40B4-BE49-F238E27FC236}">
+                <a16:creationId xmlns:a16="http://schemas.microsoft.com/office/drawing/2014/main" id="{32F794EE-3554-5B66-B42F-E1035349BC1B}"/>
+              </a:ext>
+            </a:extLst>
+          </p:cNvPr>
+          <p:cNvSpPr txBox="1"/>
+          <p:nvPr/>
+        </p:nvSpPr>
+        <p:spPr>
+          <a:xfrm>
+            <a:off x="10477500" y="485463"/>
+            <a:ext cx="647700" cy="369332"/>
+          </a:xfrm>
+          <a:prstGeom prst="rect">
+            <a:avLst/>
+          </a:prstGeom>
+          <a:noFill/>
+        </p:spPr>
+        <p:txBody>
+          <a:bodyPr wrap="square" rtlCol="0">
+            <a:spAutoFit/>
+          </a:bodyPr>
+          <a:lstStyle/>
+          <a:p>
+            <a:r>
+              <a:rPr lang="en-US" altLang="zh-TW" dirty="0"/>
+              <a:t>p55</a:t>
+            </a:r>
+            <a:endParaRPr lang="zh-TW" altLang="en-US" dirty="0"/>
+          </a:p>
+        </p:txBody>
+      </p:sp>
+      <p:pic>
+        <p:nvPicPr>
+          <p:cNvPr id="4" name="圖片 3">
+            <a:extLst>
+              <a:ext uri="{FF2B5EF4-FFF2-40B4-BE49-F238E27FC236}">
+                <a16:creationId xmlns:a16="http://schemas.microsoft.com/office/drawing/2014/main" id="{9DC49B8A-2C3B-EB84-798B-324481D1699A}"/>
+              </a:ext>
+            </a:extLst>
+          </p:cNvPr>
+          <p:cNvPicPr>
+            <a:picLocks noChangeAspect="1"/>
+          </p:cNvPicPr>
+          <p:nvPr/>
+        </p:nvPicPr>
+        <p:blipFill>
+          <a:blip r:embed="rId2"/>
+          <a:stretch>
+            <a:fillRect/>
+          </a:stretch>
+        </p:blipFill>
+        <p:spPr>
+          <a:xfrm>
+            <a:off x="363359" y="854795"/>
+            <a:ext cx="4099568" cy="3110306"/>
+          </a:xfrm>
+          <a:prstGeom prst="rect">
+            <a:avLst/>
+          </a:prstGeom>
+        </p:spPr>
+      </p:pic>
+      <p:pic>
+        <p:nvPicPr>
+          <p:cNvPr id="7" name="圖片 6">
+            <a:extLst>
+              <a:ext uri="{FF2B5EF4-FFF2-40B4-BE49-F238E27FC236}">
+                <a16:creationId xmlns:a16="http://schemas.microsoft.com/office/drawing/2014/main" id="{B392DDA7-848D-7F4B-C4D7-C9036D5AF0F2}"/>
+              </a:ext>
+            </a:extLst>
+          </p:cNvPr>
+          <p:cNvPicPr>
+            <a:picLocks noChangeAspect="1"/>
+          </p:cNvPicPr>
+          <p:nvPr/>
+        </p:nvPicPr>
+        <p:blipFill>
+          <a:blip r:embed="rId3"/>
+          <a:stretch>
+            <a:fillRect/>
+          </a:stretch>
+        </p:blipFill>
+        <p:spPr>
+          <a:xfrm>
+            <a:off x="4497998" y="1897888"/>
+            <a:ext cx="2972215" cy="2067213"/>
+          </a:xfrm>
+          <a:prstGeom prst="rect">
+            <a:avLst/>
+          </a:prstGeom>
+        </p:spPr>
+      </p:pic>
+      <p:sp>
+        <p:nvSpPr>
+          <p:cNvPr id="8" name="文字方塊 7">
+            <a:extLst>
+              <a:ext uri="{FF2B5EF4-FFF2-40B4-BE49-F238E27FC236}">
+                <a16:creationId xmlns:a16="http://schemas.microsoft.com/office/drawing/2014/main" id="{0A1D85DC-6CEE-9961-C2AF-62D3A6D411BC}"/>
+              </a:ext>
+            </a:extLst>
+          </p:cNvPr>
+          <p:cNvSpPr txBox="1"/>
+          <p:nvPr/>
+        </p:nvSpPr>
+        <p:spPr>
+          <a:xfrm>
+            <a:off x="4462927" y="1420419"/>
+            <a:ext cx="1576629" cy="369332"/>
+          </a:xfrm>
+          <a:prstGeom prst="rect">
+            <a:avLst/>
+          </a:prstGeom>
+          <a:noFill/>
+        </p:spPr>
+        <p:txBody>
+          <a:bodyPr wrap="square" rtlCol="0">
+            <a:spAutoFit/>
+          </a:bodyPr>
+          <a:lstStyle/>
+          <a:p>
+            <a:r>
+              <a:rPr lang="zh-TW" altLang="en-US" dirty="0"/>
+              <a:t>輸出</a:t>
+            </a:r>
+            <a:endParaRPr lang="en-US" altLang="zh-TW" dirty="0"/>
+          </a:p>
+        </p:txBody>
+      </p:sp>
+      <p:pic>
+        <p:nvPicPr>
+          <p:cNvPr id="10" name="圖片 9">
+            <a:extLst>
+              <a:ext uri="{FF2B5EF4-FFF2-40B4-BE49-F238E27FC236}">
+                <a16:creationId xmlns:a16="http://schemas.microsoft.com/office/drawing/2014/main" id="{328C5D79-CC90-27C5-7F32-83DAFBD19815}"/>
+              </a:ext>
+            </a:extLst>
+          </p:cNvPr>
+          <p:cNvPicPr>
+            <a:picLocks noChangeAspect="1"/>
+          </p:cNvPicPr>
+          <p:nvPr/>
+        </p:nvPicPr>
+        <p:blipFill>
+          <a:blip r:embed="rId4"/>
+          <a:stretch>
+            <a:fillRect/>
+          </a:stretch>
+        </p:blipFill>
+        <p:spPr>
+          <a:xfrm>
+            <a:off x="7614775" y="1420419"/>
+            <a:ext cx="4425493" cy="1614217"/>
+          </a:xfrm>
+          <a:prstGeom prst="rect">
+            <a:avLst/>
+          </a:prstGeom>
+        </p:spPr>
+      </p:pic>
+      <p:pic>
+        <p:nvPicPr>
+          <p:cNvPr id="12" name="圖片 11">
+            <a:extLst>
+              <a:ext uri="{FF2B5EF4-FFF2-40B4-BE49-F238E27FC236}">
+                <a16:creationId xmlns:a16="http://schemas.microsoft.com/office/drawing/2014/main" id="{E6D35D5A-BB04-4146-FFFD-172968143D1B}"/>
+              </a:ext>
+            </a:extLst>
+          </p:cNvPr>
+          <p:cNvPicPr>
+            <a:picLocks noChangeAspect="1"/>
+          </p:cNvPicPr>
+          <p:nvPr/>
+        </p:nvPicPr>
+        <p:blipFill>
+          <a:blip r:embed="rId5"/>
+          <a:stretch>
+            <a:fillRect/>
+          </a:stretch>
+        </p:blipFill>
+        <p:spPr>
+          <a:xfrm>
+            <a:off x="7567151" y="3220480"/>
+            <a:ext cx="4473118" cy="1232478"/>
+          </a:xfrm>
+          <a:prstGeom prst="rect">
+            <a:avLst/>
+          </a:prstGeom>
+        </p:spPr>
+      </p:pic>
+      <p:sp>
+        <p:nvSpPr>
+          <p:cNvPr id="13" name="矩形 12">
+            <a:extLst>
+              <a:ext uri="{FF2B5EF4-FFF2-40B4-BE49-F238E27FC236}">
+                <a16:creationId xmlns:a16="http://schemas.microsoft.com/office/drawing/2014/main" id="{9CBFB06D-71F8-5982-6E51-67D7293DB3E1}"/>
+              </a:ext>
+            </a:extLst>
+          </p:cNvPr>
+          <p:cNvSpPr/>
+          <p:nvPr/>
+        </p:nvSpPr>
+        <p:spPr>
+          <a:xfrm>
+            <a:off x="8515350" y="2228850"/>
+            <a:ext cx="530082" cy="161925"/>
+          </a:xfrm>
+          <a:prstGeom prst="rect">
+            <a:avLst/>
+          </a:prstGeom>
+          <a:noFill/>
+          <a:ln>
+            <a:solidFill>
+              <a:srgbClr val="FF0000"/>
+            </a:solidFill>
+          </a:ln>
+        </p:spPr>
+        <p:style>
+          <a:lnRef idx="2">
+            <a:schemeClr val="accent1">
+              <a:shade val="15000"/>
+            </a:schemeClr>
+          </a:lnRef>
+          <a:fillRef idx="1">
+            <a:schemeClr val="accent1"/>
+          </a:fillRef>
+          <a:effectRef idx="0">
+            <a:schemeClr val="accent1"/>
+          </a:effectRef>
+          <a:fontRef idx="minor">
+            <a:schemeClr val="lt1"/>
+          </a:fontRef>
+        </p:style>
+        <p:txBody>
+          <a:bodyPr rtlCol="0" anchor="ctr"/>
+          <a:lstStyle/>
+          <a:p>
+            <a:pPr algn="ctr"/>
+            <a:endParaRPr lang="zh-TW" altLang="en-US"/>
+          </a:p>
+        </p:txBody>
+      </p:sp>
+    </p:spTree>
+    <p:extLst>
+      <p:ext uri="{BB962C8B-B14F-4D97-AF65-F5344CB8AC3E}">
+        <p14:creationId xmlns:p14="http://schemas.microsoft.com/office/powerpoint/2010/main" val="1748585579"/>
+      </p:ext>
+    </p:extLst>
+  </p:cSld>
+  <p:clrMapOvr>
+    <a:masterClrMapping/>
+  </p:clrMapOvr>
+</p:sld>
+</file>
+
+<file path=ppt/slides/slide9.xml><?xml version="1.0" encoding="utf-8"?>
+<p:sld xmlns:a="http://schemas.openxmlformats.org/drawingml/2006/main" xmlns:r="http://schemas.openxmlformats.org/officeDocument/2006/relationships" xmlns:p="http://schemas.openxmlformats.org/presentationml/2006/main">
+  <p:cSld>
+    <p:spTree>
+      <p:nvGrpSpPr>
+        <p:cNvPr id="1" name="">
+          <a:extLst>
+            <a:ext uri="{FF2B5EF4-FFF2-40B4-BE49-F238E27FC236}">
+              <a16:creationId xmlns:a16="http://schemas.microsoft.com/office/drawing/2014/main" id="{8F067FE0-05D8-D3F9-EE1C-5E505EA94A14}"/>
+            </a:ext>
+          </a:extLst>
+        </p:cNvPr>
+        <p:cNvGrpSpPr/>
+        <p:nvPr/>
+      </p:nvGrpSpPr>
+      <p:grpSpPr>
+        <a:xfrm>
+          <a:off x="0" y="0"/>
+          <a:ext cx="0" cy="0"/>
+          <a:chOff x="0" y="0"/>
+          <a:chExt cx="0" cy="0"/>
+        </a:xfrm>
+      </p:grpSpPr>
+      <p:sp>
+        <p:nvSpPr>
+          <p:cNvPr id="2" name="文字方塊 1">
+            <a:extLst>
+              <a:ext uri="{FF2B5EF4-FFF2-40B4-BE49-F238E27FC236}">
+                <a16:creationId xmlns:a16="http://schemas.microsoft.com/office/drawing/2014/main" id="{CA21CCCF-EC05-CCAA-C509-C48C15B6332D}"/>
+              </a:ext>
+            </a:extLst>
+          </p:cNvPr>
+          <p:cNvSpPr txBox="1"/>
+          <p:nvPr/>
+        </p:nvSpPr>
+        <p:spPr>
+          <a:xfrm>
+            <a:off x="10477500" y="485463"/>
+            <a:ext cx="647700" cy="369332"/>
+          </a:xfrm>
+          <a:prstGeom prst="rect">
+            <a:avLst/>
+          </a:prstGeom>
+          <a:noFill/>
+        </p:spPr>
+        <p:txBody>
+          <a:bodyPr wrap="square" rtlCol="0">
+            <a:spAutoFit/>
+          </a:bodyPr>
+          <a:lstStyle/>
+          <a:p>
+            <a:r>
+              <a:rPr lang="en-US" altLang="zh-TW" dirty="0"/>
+              <a:t>p56</a:t>
+            </a:r>
+            <a:endParaRPr lang="zh-TW" altLang="en-US" dirty="0"/>
+          </a:p>
+        </p:txBody>
+      </p:sp>
+      <p:sp>
+        <p:nvSpPr>
+          <p:cNvPr id="8" name="文字方塊 7">
+            <a:extLst>
+              <a:ext uri="{FF2B5EF4-FFF2-40B4-BE49-F238E27FC236}">
+                <a16:creationId xmlns:a16="http://schemas.microsoft.com/office/drawing/2014/main" id="{2DC03763-1F18-2531-FC1B-7A827CD35E26}"/>
+              </a:ext>
+            </a:extLst>
+          </p:cNvPr>
+          <p:cNvSpPr txBox="1"/>
+          <p:nvPr/>
+        </p:nvSpPr>
+        <p:spPr>
+          <a:xfrm>
+            <a:off x="3520793" y="854795"/>
+            <a:ext cx="794873" cy="369332"/>
+          </a:xfrm>
+          <a:prstGeom prst="rect">
+            <a:avLst/>
+          </a:prstGeom>
+          <a:noFill/>
+        </p:spPr>
+        <p:txBody>
+          <a:bodyPr wrap="square" rtlCol="0">
+            <a:spAutoFit/>
+          </a:bodyPr>
+          <a:lstStyle/>
+          <a:p>
+            <a:r>
+              <a:rPr lang="zh-TW" altLang="en-US" dirty="0"/>
+              <a:t>輸出</a:t>
+            </a:r>
+            <a:endParaRPr lang="en-US" altLang="zh-TW" dirty="0"/>
+          </a:p>
+        </p:txBody>
+      </p:sp>
+      <p:pic>
+        <p:nvPicPr>
+          <p:cNvPr id="6" name="圖片 5">
+            <a:extLst>
+              <a:ext uri="{FF2B5EF4-FFF2-40B4-BE49-F238E27FC236}">
+                <a16:creationId xmlns:a16="http://schemas.microsoft.com/office/drawing/2014/main" id="{19AA698C-720B-51AE-E84A-2653BD53F46D}"/>
+              </a:ext>
+            </a:extLst>
+          </p:cNvPr>
+          <p:cNvPicPr>
+            <a:picLocks noChangeAspect="1"/>
+          </p:cNvPicPr>
+          <p:nvPr/>
+        </p:nvPicPr>
+        <p:blipFill>
+          <a:blip r:embed="rId2"/>
+          <a:srcRect r="30609"/>
+          <a:stretch>
+            <a:fillRect/>
+          </a:stretch>
+        </p:blipFill>
+        <p:spPr>
+          <a:xfrm>
+            <a:off x="148663" y="854795"/>
+            <a:ext cx="3318051" cy="2772616"/>
+          </a:xfrm>
+          <a:prstGeom prst="rect">
+            <a:avLst/>
+          </a:prstGeom>
+        </p:spPr>
+      </p:pic>
+      <p:pic>
+        <p:nvPicPr>
+          <p:cNvPr id="11" name="圖片 10">
+            <a:extLst>
+              <a:ext uri="{FF2B5EF4-FFF2-40B4-BE49-F238E27FC236}">
+                <a16:creationId xmlns:a16="http://schemas.microsoft.com/office/drawing/2014/main" id="{C747EA1C-82E7-BC01-9769-DE9277A45464}"/>
+              </a:ext>
+            </a:extLst>
+          </p:cNvPr>
+          <p:cNvPicPr>
+            <a:picLocks noChangeAspect="1"/>
+          </p:cNvPicPr>
+          <p:nvPr/>
+        </p:nvPicPr>
+        <p:blipFill>
+          <a:blip r:embed="rId3"/>
+          <a:stretch>
+            <a:fillRect/>
+          </a:stretch>
+        </p:blipFill>
+        <p:spPr>
+          <a:xfrm>
+            <a:off x="130197" y="3774872"/>
+            <a:ext cx="2676899" cy="2076740"/>
+          </a:xfrm>
+          <a:prstGeom prst="rect">
+            <a:avLst/>
+          </a:prstGeom>
+        </p:spPr>
+      </p:pic>
+      <p:pic>
+        <p:nvPicPr>
+          <p:cNvPr id="15" name="圖片 14">
+            <a:extLst>
+              <a:ext uri="{FF2B5EF4-FFF2-40B4-BE49-F238E27FC236}">
+                <a16:creationId xmlns:a16="http://schemas.microsoft.com/office/drawing/2014/main" id="{DA944C3C-3282-C355-F448-F8B3C1CC3EC1}"/>
+              </a:ext>
+            </a:extLst>
+          </p:cNvPr>
+          <p:cNvPicPr>
+            <a:picLocks noChangeAspect="1"/>
+          </p:cNvPicPr>
+          <p:nvPr/>
+        </p:nvPicPr>
+        <p:blipFill>
+          <a:blip r:embed="rId4"/>
+          <a:stretch>
+            <a:fillRect/>
+          </a:stretch>
+        </p:blipFill>
+        <p:spPr>
+          <a:xfrm>
+            <a:off x="3520793" y="1523893"/>
+            <a:ext cx="3770132" cy="1691642"/>
+          </a:xfrm>
+          <a:prstGeom prst="rect">
+            <a:avLst/>
+          </a:prstGeom>
+        </p:spPr>
+      </p:pic>
+      <p:pic>
+        <p:nvPicPr>
+          <p:cNvPr id="17" name="圖片 16">
+            <a:extLst>
+              <a:ext uri="{FF2B5EF4-FFF2-40B4-BE49-F238E27FC236}">
+                <a16:creationId xmlns:a16="http://schemas.microsoft.com/office/drawing/2014/main" id="{778D1512-D866-3387-8226-7A12B5A4AB0D}"/>
+              </a:ext>
+            </a:extLst>
+          </p:cNvPr>
+          <p:cNvPicPr>
+            <a:picLocks noChangeAspect="1"/>
+          </p:cNvPicPr>
+          <p:nvPr/>
+        </p:nvPicPr>
+        <p:blipFill>
+          <a:blip r:embed="rId5"/>
+          <a:stretch>
+            <a:fillRect/>
+          </a:stretch>
+        </p:blipFill>
+        <p:spPr>
+          <a:xfrm>
+            <a:off x="7345005" y="1523893"/>
+            <a:ext cx="4610774" cy="1782469"/>
+          </a:xfrm>
+          <a:prstGeom prst="rect">
+            <a:avLst/>
+          </a:prstGeom>
+        </p:spPr>
+      </p:pic>
+      <p:pic>
+        <p:nvPicPr>
+          <p:cNvPr id="19" name="圖片 18">
+            <a:extLst>
+              <a:ext uri="{FF2B5EF4-FFF2-40B4-BE49-F238E27FC236}">
+                <a16:creationId xmlns:a16="http://schemas.microsoft.com/office/drawing/2014/main" id="{4D90653D-C445-40C5-B193-E99A68A367B4}"/>
+              </a:ext>
+            </a:extLst>
+          </p:cNvPr>
+          <p:cNvPicPr>
+            <a:picLocks noChangeAspect="1"/>
+          </p:cNvPicPr>
+          <p:nvPr/>
+        </p:nvPicPr>
+        <p:blipFill>
+          <a:blip r:embed="rId6"/>
+          <a:stretch>
+            <a:fillRect/>
+          </a:stretch>
+        </p:blipFill>
+        <p:spPr>
+          <a:xfrm>
+            <a:off x="7345005" y="3551639"/>
+            <a:ext cx="4716798" cy="1544236"/>
+          </a:xfrm>
+          <a:prstGeom prst="rect">
+            <a:avLst/>
+          </a:prstGeom>
+        </p:spPr>
+      </p:pic>
+      <p:pic>
+        <p:nvPicPr>
+          <p:cNvPr id="21" name="圖片 20">
+            <a:extLst>
+              <a:ext uri="{FF2B5EF4-FFF2-40B4-BE49-F238E27FC236}">
+                <a16:creationId xmlns:a16="http://schemas.microsoft.com/office/drawing/2014/main" id="{B01BA69D-1EAF-98A1-2C44-B1F5A38AFD99}"/>
+              </a:ext>
+            </a:extLst>
+          </p:cNvPr>
+          <p:cNvPicPr>
+            <a:picLocks noChangeAspect="1"/>
+          </p:cNvPicPr>
+          <p:nvPr/>
+        </p:nvPicPr>
+        <p:blipFill>
+          <a:blip r:embed="rId7"/>
+          <a:stretch>
+            <a:fillRect/>
+          </a:stretch>
+        </p:blipFill>
+        <p:spPr>
+          <a:xfrm>
+            <a:off x="5827724" y="5464115"/>
+            <a:ext cx="6128055" cy="774995"/>
+          </a:xfrm>
+          <a:prstGeom prst="rect">
+            <a:avLst/>
+          </a:prstGeom>
+        </p:spPr>
+      </p:pic>
+    </p:spTree>
+    <p:extLst>
+      <p:ext uri="{BB962C8B-B14F-4D97-AF65-F5344CB8AC3E}">
+        <p14:creationId xmlns:p14="http://schemas.microsoft.com/office/powerpoint/2010/main" val="760654787"/>
       </p:ext>
     </p:extLst>
   </p:cSld>
